--- a/docs/Project11_Presentation.pptx
+++ b/docs/Project11_Presentation.pptx
@@ -2,24 +2,24 @@
 <file path=ppt/presentation.xml><?xml version="1.0" encoding="utf-8"?>
 <p:presentation xmlns:p="http://schemas.openxmlformats.org/presentationml/2006/main">
   <p:sldMasterIdLst>
-    <p:sldMasterId xmlns:r="http://schemas.openxmlformats.org/officeDocument/2006/relationships" id="2147483648" r:id="Rbec37e8ebe8940c4"/>
+    <p:sldMasterId xmlns:r="http://schemas.openxmlformats.org/officeDocument/2006/relationships" id="2147483648" r:id="Rabcb0c207a4940e5"/>
   </p:sldMasterIdLst>
   <p:notesMasterIdLst>
-    <p:notesMasterId xmlns:r="http://schemas.openxmlformats.org/officeDocument/2006/relationships" r:id="Rb62f6d7a62234da9"/>
+    <p:notesMasterId xmlns:r="http://schemas.openxmlformats.org/officeDocument/2006/relationships" r:id="R9db55f19b37a442d"/>
   </p:notesMasterIdLst>
   <p:sldIdLst>
-    <p:sldId xmlns:r="http://schemas.openxmlformats.org/officeDocument/2006/relationships" id="256" r:id="R6ab7e3024f0a4fef"/>
-    <p:sldId xmlns:r="http://schemas.openxmlformats.org/officeDocument/2006/relationships" id="257" r:id="R5e6de653e1c74bb1"/>
-    <p:sldId xmlns:r="http://schemas.openxmlformats.org/officeDocument/2006/relationships" id="258" r:id="R81022651ac174e66"/>
-    <p:sldId xmlns:r="http://schemas.openxmlformats.org/officeDocument/2006/relationships" id="259" r:id="R3dd32269525a42b2"/>
-    <p:sldId xmlns:r="http://schemas.openxmlformats.org/officeDocument/2006/relationships" id="260" r:id="R466adb4e06374438"/>
-    <p:sldId xmlns:r="http://schemas.openxmlformats.org/officeDocument/2006/relationships" id="261" r:id="R47ff82277aa94026"/>
-    <p:sldId xmlns:r="http://schemas.openxmlformats.org/officeDocument/2006/relationships" id="262" r:id="R39505631f9584c34"/>
-    <p:sldId xmlns:r="http://schemas.openxmlformats.org/officeDocument/2006/relationships" id="263" r:id="R3e5dcc292fea44cf"/>
-    <p:sldId xmlns:r="http://schemas.openxmlformats.org/officeDocument/2006/relationships" id="264" r:id="R20e8f1fcbd124630"/>
-    <p:sldId xmlns:r="http://schemas.openxmlformats.org/officeDocument/2006/relationships" id="265" r:id="R9dc60bc1ee3b43bb"/>
-    <p:sldId xmlns:r="http://schemas.openxmlformats.org/officeDocument/2006/relationships" id="266" r:id="R069ef362f876498e"/>
-    <p:sldId xmlns:r="http://schemas.openxmlformats.org/officeDocument/2006/relationships" id="267" r:id="R0e5aaf04e0ea4b53"/>
+    <p:sldId xmlns:r="http://schemas.openxmlformats.org/officeDocument/2006/relationships" id="256" r:id="R9baf482497d5406a"/>
+    <p:sldId xmlns:r="http://schemas.openxmlformats.org/officeDocument/2006/relationships" id="257" r:id="R8472a3f897a5490f"/>
+    <p:sldId xmlns:r="http://schemas.openxmlformats.org/officeDocument/2006/relationships" id="258" r:id="Rc69fe9c4705b4adc"/>
+    <p:sldId xmlns:r="http://schemas.openxmlformats.org/officeDocument/2006/relationships" id="259" r:id="R5a8d97aeb7974890"/>
+    <p:sldId xmlns:r="http://schemas.openxmlformats.org/officeDocument/2006/relationships" id="260" r:id="R167495d447bb4d2d"/>
+    <p:sldId xmlns:r="http://schemas.openxmlformats.org/officeDocument/2006/relationships" id="261" r:id="R42caad58b66542d6"/>
+    <p:sldId xmlns:r="http://schemas.openxmlformats.org/officeDocument/2006/relationships" id="262" r:id="R5762fb66895e43c8"/>
+    <p:sldId xmlns:r="http://schemas.openxmlformats.org/officeDocument/2006/relationships" id="263" r:id="R688604a4cc0b4509"/>
+    <p:sldId xmlns:r="http://schemas.openxmlformats.org/officeDocument/2006/relationships" id="264" r:id="R0fcecd919aa64219"/>
+    <p:sldId xmlns:r="http://schemas.openxmlformats.org/officeDocument/2006/relationships" id="265" r:id="Rd249324b3ce84e9f"/>
+    <p:sldId xmlns:r="http://schemas.openxmlformats.org/officeDocument/2006/relationships" id="266" r:id="Rddb85c7b465d4232"/>
+    <p:sldId xmlns:r="http://schemas.openxmlformats.org/officeDocument/2006/relationships" id="267" r:id="R568859ee30f04668"/>
   </p:sldIdLst>
   <p:sldSz cx="12192000" cy="6858000"/>
   <p:notesSz cx="6858000" cy="9144000"/>
@@ -1390,7 +1390,7 @@
           <p:cNvPr id="3" name="Title">
             <a:extLst xmlns:a="http://schemas.openxmlformats.org/drawingml/2006/main">
               <a:ext uri="{FF2B5EF4-FFF2-40B4-BE49-F238E27FC236}">
-                <a16:creationId xmlns:a16="http://schemas.microsoft.com/office/drawing/2014/main" id="{38D03377-0A71-4F20-A125-8913F2EF42A8}"/>
+                <a16:creationId xmlns:a16="http://schemas.microsoft.com/office/drawing/2014/main" id="{9593A3F5-3D56-4AE4-BA79-5D2E6FB38F73}"/>
               </a:ext>
             </a:extLst>
           </p:cNvPr>
@@ -1619,7 +1619,7 @@
           <p:cNvPr id="2" name="Subtitle">
             <a:extLst xmlns:a="http://schemas.openxmlformats.org/drawingml/2006/main">
               <a:ext uri="{FF2B5EF4-FFF2-40B4-BE49-F238E27FC236}">
-                <a16:creationId xmlns:a16="http://schemas.microsoft.com/office/drawing/2014/main" id="{B561915E-F868-48C0-A527-9ED9EBE780DF}"/>
+                <a16:creationId xmlns:a16="http://schemas.microsoft.com/office/drawing/2014/main" id="{D2D019FA-7A57-4831-85E3-3FE04DD2A4A5}"/>
               </a:ext>
             </a:extLst>
           </p:cNvPr>
@@ -1865,7 +1865,7 @@
           <p:cNvPr id="2" name="Section title">
             <a:extLst xmlns:a="http://schemas.openxmlformats.org/drawingml/2006/main">
               <a:ext uri="{FF2B5EF4-FFF2-40B4-BE49-F238E27FC236}">
-                <a16:creationId xmlns:a16="http://schemas.microsoft.com/office/drawing/2014/main" id="{FE43F191-5ABF-4AEE-B5EF-1378D08A180B}"/>
+                <a16:creationId xmlns:a16="http://schemas.microsoft.com/office/drawing/2014/main" id="{E431E062-414F-4EA8-9AB5-F05D0EAD2963}"/>
               </a:ext>
             </a:extLst>
           </p:cNvPr>
@@ -2111,7 +2111,7 @@
           <p:cNvPr id="3" name="Title">
             <a:extLst xmlns:a="http://schemas.openxmlformats.org/drawingml/2006/main">
               <a:ext uri="{FF2B5EF4-FFF2-40B4-BE49-F238E27FC236}">
-                <a16:creationId xmlns:a16="http://schemas.microsoft.com/office/drawing/2014/main" id="{460EE24B-7738-4AC0-B020-074B6D7BA602}"/>
+                <a16:creationId xmlns:a16="http://schemas.microsoft.com/office/drawing/2014/main" id="{1F96D547-B358-4EB9-9963-1E73AE20D1A0}"/>
               </a:ext>
             </a:extLst>
           </p:cNvPr>
@@ -2340,7 +2340,7 @@
           <p:cNvPr id="2" name="Body">
             <a:extLst xmlns:a="http://schemas.openxmlformats.org/drawingml/2006/main">
               <a:ext uri="{FF2B5EF4-FFF2-40B4-BE49-F238E27FC236}">
-                <a16:creationId xmlns:a16="http://schemas.microsoft.com/office/drawing/2014/main" id="{8E309483-C45E-4391-93E6-5DEEEA85C3FC}"/>
+                <a16:creationId xmlns:a16="http://schemas.microsoft.com/office/drawing/2014/main" id="{F9F7C92A-9F5D-444B-BBE4-60094B9147C0}"/>
               </a:ext>
             </a:extLst>
           </p:cNvPr>
@@ -2586,7 +2586,7 @@
           <p:cNvPr id="4" name="Title">
             <a:extLst xmlns:a="http://schemas.openxmlformats.org/drawingml/2006/main">
               <a:ext uri="{FF2B5EF4-FFF2-40B4-BE49-F238E27FC236}">
-                <a16:creationId xmlns:a16="http://schemas.microsoft.com/office/drawing/2014/main" id="{7AA03861-FAC1-4104-B0C1-4709BE0C29DD}"/>
+                <a16:creationId xmlns:a16="http://schemas.microsoft.com/office/drawing/2014/main" id="{4DE42435-D9F9-4ACB-BF9E-DD6BB7E0A0C5}"/>
               </a:ext>
             </a:extLst>
           </p:cNvPr>
@@ -2815,7 +2815,7 @@
           <p:cNvPr id="2" name="Left column">
             <a:extLst xmlns:a="http://schemas.openxmlformats.org/drawingml/2006/main">
               <a:ext uri="{FF2B5EF4-FFF2-40B4-BE49-F238E27FC236}">
-                <a16:creationId xmlns:a16="http://schemas.microsoft.com/office/drawing/2014/main" id="{1E236C20-5C3B-453A-9EB3-5B509164B689}"/>
+                <a16:creationId xmlns:a16="http://schemas.microsoft.com/office/drawing/2014/main" id="{0E7D40C3-5A66-438A-9600-EF04208EF0D6}"/>
               </a:ext>
             </a:extLst>
           </p:cNvPr>
@@ -3044,7 +3044,7 @@
           <p:cNvPr id="3" name="Right column">
             <a:extLst xmlns:a="http://schemas.openxmlformats.org/drawingml/2006/main">
               <a:ext uri="{FF2B5EF4-FFF2-40B4-BE49-F238E27FC236}">
-                <a16:creationId xmlns:a16="http://schemas.microsoft.com/office/drawing/2014/main" id="{8B7FF994-B0FA-40AE-B056-E18752AD74D6}"/>
+                <a16:creationId xmlns:a16="http://schemas.microsoft.com/office/drawing/2014/main" id="{CE5A0359-CD45-44EE-8E35-16FA525ED9B1}"/>
               </a:ext>
             </a:extLst>
           </p:cNvPr>
@@ -3290,7 +3290,7 @@
           <p:cNvPr id="3" name="Title">
             <a:extLst xmlns:a="http://schemas.openxmlformats.org/drawingml/2006/main">
               <a:ext uri="{FF2B5EF4-FFF2-40B4-BE49-F238E27FC236}">
-                <a16:creationId xmlns:a16="http://schemas.microsoft.com/office/drawing/2014/main" id="{701D0637-2DFA-4D74-8308-DE86A1F148BD}"/>
+                <a16:creationId xmlns:a16="http://schemas.microsoft.com/office/drawing/2014/main" id="{7A8A9969-AFCF-41E6-B1F2-9673CC6CBD5B}"/>
               </a:ext>
             </a:extLst>
           </p:cNvPr>
@@ -3519,7 +3519,7 @@
           <p:cNvPr id="2" name="Left column">
             <a:extLst xmlns:a="http://schemas.openxmlformats.org/drawingml/2006/main">
               <a:ext uri="{FF2B5EF4-FFF2-40B4-BE49-F238E27FC236}">
-                <a16:creationId xmlns:a16="http://schemas.microsoft.com/office/drawing/2014/main" id="{80D0899C-D10E-416B-AD09-D6A8C3EC0423}"/>
+                <a16:creationId xmlns:a16="http://schemas.microsoft.com/office/drawing/2014/main" id="{E5710723-DA01-40BE-8B38-077DF3F53943}"/>
               </a:ext>
             </a:extLst>
           </p:cNvPr>
@@ -3786,12 +3786,12 @@
   </p:cSld>
   <p:clrMap bg1="lt1" tx1="dk1" bg2="lt2" tx2="dk2" accent1="accent1" accent2="accent2" accent3="accent3" accent4="accent4" accent5="accent5" accent6="accent6" hlink="hlink" folHlink="folHlink"/>
   <p:sldLayoutIdLst>
-    <p:sldLayoutId xmlns:r="http://schemas.openxmlformats.org/officeDocument/2006/relationships" id="2147483649" r:id="R9e7ed47972474e89"/>
-    <p:sldLayoutId xmlns:r="http://schemas.openxmlformats.org/officeDocument/2006/relationships" id="2147483650" r:id="Re10100bf2d97485f"/>
-    <p:sldLayoutId xmlns:r="http://schemas.openxmlformats.org/officeDocument/2006/relationships" id="2147483651" r:id="R274cd7acaae94183"/>
-    <p:sldLayoutId xmlns:r="http://schemas.openxmlformats.org/officeDocument/2006/relationships" id="2147483652" r:id="R16af683b5d3b488f"/>
-    <p:sldLayoutId xmlns:r="http://schemas.openxmlformats.org/officeDocument/2006/relationships" id="2147483653" r:id="Re76f79e03f944b31"/>
-    <p:sldLayoutId xmlns:r="http://schemas.openxmlformats.org/officeDocument/2006/relationships" id="2147483654" r:id="Rd31ecdee79474e80"/>
+    <p:sldLayoutId xmlns:r="http://schemas.openxmlformats.org/officeDocument/2006/relationships" id="2147483649" r:id="Rf96871e0f67f40fd"/>
+    <p:sldLayoutId xmlns:r="http://schemas.openxmlformats.org/officeDocument/2006/relationships" id="2147483650" r:id="R0153f47588064a2b"/>
+    <p:sldLayoutId xmlns:r="http://schemas.openxmlformats.org/officeDocument/2006/relationships" id="2147483651" r:id="R9411a57e43d24eee"/>
+    <p:sldLayoutId xmlns:r="http://schemas.openxmlformats.org/officeDocument/2006/relationships" id="2147483652" r:id="R86ee0304a10a4cbc"/>
+    <p:sldLayoutId xmlns:r="http://schemas.openxmlformats.org/officeDocument/2006/relationships" id="2147483653" r:id="R2483b1904f3745d8"/>
+    <p:sldLayoutId xmlns:r="http://schemas.openxmlformats.org/officeDocument/2006/relationships" id="2147483654" r:id="R76f7e27be161419e"/>
   </p:sldLayoutIdLst>
   <p:txStyles>
     <p:titleStyle>
@@ -8532,10 +8532,10 @@
       </p:grpSpPr>
       <p:sp>
         <p:nvSpPr>
-          <p:cNvPr id="7" name="">
+          <p:cNvPr id="8" name="">
             <a:extLst xmlns:a="http://schemas.openxmlformats.org/drawingml/2006/main">
               <a:ext uri="{FF2B5EF4-FFF2-40B4-BE49-F238E27FC236}">
-                <a16:creationId xmlns:a16="http://schemas.microsoft.com/office/drawing/2014/main" id="{B6CA3A63-3A98-418D-917E-E6A52E915855}"/>
+                <a16:creationId xmlns:a16="http://schemas.microsoft.com/office/drawing/2014/main" id="{4037FD0F-EA16-4ABA-98AF-307552465640}"/>
               </a:ext>
             </a:extLst>
           </p:cNvPr>
@@ -8716,7 +8716,7 @@
           <p:cNvPr id="2" name="">
             <a:extLst xmlns:a="http://schemas.openxmlformats.org/drawingml/2006/main">
               <a:ext uri="{FF2B5EF4-FFF2-40B4-BE49-F238E27FC236}">
-                <a16:creationId xmlns:a16="http://schemas.microsoft.com/office/drawing/2014/main" id="{63CD3E54-F9BD-43E3-B2DE-73A50F93C4F2}"/>
+                <a16:creationId xmlns:a16="http://schemas.microsoft.com/office/drawing/2014/main" id="{C9DF787B-0B6A-4CBC-99B3-C0F0980120FA}"/>
               </a:ext>
             </a:extLst>
           </p:cNvPr>
@@ -8727,8 +8727,8 @@
         </p:nvSpPr>
         <p:spPr>
           <a:xfrm xmlns:a="http://schemas.openxmlformats.org/drawingml/2006/main">
-            <a:off x="647700" y="2143125"/>
-            <a:ext cx="4000500" cy="857250"/>
+            <a:off x="647700" y="2095500"/>
+            <a:ext cx="4476750" cy="400050"/>
           </a:xfrm>
           <a:prstGeom xmlns:a="http://schemas.openxmlformats.org/drawingml/2006/main" prst="rect">
             <a:avLst/>
@@ -8744,7 +8744,7 @@
           </a:bodyPr>
           <a:lstStyle xmlns:a="http://schemas.openxmlformats.org/drawingml/2006/main">
             <a:defPPr>
-              <a:defRPr sz="2100" b="0">
+              <a:defRPr sz="1950" b="0">
                 <a:solidFill>
                   <a:srgbClr val="535E6C"/>
                 </a:solidFill>
@@ -8754,7 +8754,7 @@
               </a:defRPr>
             </a:defPPr>
             <a:lvl1pPr>
-              <a:defRPr sz="2100" b="0">
+              <a:defRPr sz="1950" b="0">
                 <a:solidFill>
                   <a:srgbClr val="535E6C"/>
                 </a:solidFill>
@@ -8764,7 +8764,7 @@
               </a:defRPr>
             </a:lvl1pPr>
             <a:lvl2pPr>
-              <a:defRPr sz="2100" b="0">
+              <a:defRPr sz="1950" b="0">
                 <a:solidFill>
                   <a:srgbClr val="535E6C"/>
                 </a:solidFill>
@@ -8774,7 +8774,7 @@
               </a:defRPr>
             </a:lvl2pPr>
             <a:lvl3pPr>
-              <a:defRPr sz="2100" b="0">
+              <a:defRPr sz="1950" b="0">
                 <a:solidFill>
                   <a:srgbClr val="535E6C"/>
                 </a:solidFill>
@@ -8784,7 +8784,7 @@
               </a:defRPr>
             </a:lvl3pPr>
             <a:lvl4pPr>
-              <a:defRPr sz="2100" b="0">
+              <a:defRPr sz="1950" b="0">
                 <a:solidFill>
                   <a:srgbClr val="535E6C"/>
                 </a:solidFill>
@@ -8794,7 +8794,7 @@
               </a:defRPr>
             </a:lvl4pPr>
             <a:lvl5pPr>
-              <a:defRPr sz="2100" b="0">
+              <a:defRPr sz="1950" b="0">
                 <a:solidFill>
                   <a:srgbClr val="535E6C"/>
                 </a:solidFill>
@@ -8804,7 +8804,7 @@
               </a:defRPr>
             </a:lvl5pPr>
             <a:lvl6pPr>
-              <a:defRPr sz="2100" b="0">
+              <a:defRPr sz="1950" b="0">
                 <a:solidFill>
                   <a:srgbClr val="535E6C"/>
                 </a:solidFill>
@@ -8814,7 +8814,7 @@
               </a:defRPr>
             </a:lvl6pPr>
             <a:lvl7pPr>
-              <a:defRPr sz="2100" b="0">
+              <a:defRPr sz="1950" b="0">
                 <a:solidFill>
                   <a:srgbClr val="535E6C"/>
                 </a:solidFill>
@@ -8824,7 +8824,7 @@
               </a:defRPr>
             </a:lvl7pPr>
             <a:lvl8pPr>
-              <a:defRPr sz="2100" b="0">
+              <a:defRPr sz="1950" b="0">
                 <a:solidFill>
                   <a:srgbClr val="535E6C"/>
                 </a:solidFill>
@@ -8834,7 +8834,7 @@
               </a:defRPr>
             </a:lvl8pPr>
             <a:lvl9pPr>
-              <a:defRPr sz="2100" b="0">
+              <a:defRPr sz="1950" b="0">
                 <a:solidFill>
                   <a:srgbClr val="535E6C"/>
                 </a:solidFill>
@@ -8846,7 +8846,7 @@
           </a:lstStyle>
           <a:p xmlns:a="http://schemas.openxmlformats.org/drawingml/2006/main">
             <a:pPr>
-              <a:defRPr sz="2100" b="0">
+              <a:defRPr sz="1950" b="0">
                 <a:solidFill>
                   <a:srgbClr val="535E6C"/>
                 </a:solidFill>
@@ -8856,7 +8856,7 @@
               </a:defRPr>
             </a:pPr>
             <a:r>
-              <a:rPr sz="2100" b="0">
+              <a:rPr sz="1950" b="0">
                 <a:solidFill>
                   <a:srgbClr val="535E6C"/>
                 </a:solidFill>
@@ -8864,40 +8864,876 @@
                 <a:ea typeface="Arial"/>
                 <a:cs typeface="Arial"/>
               </a:rPr>
-              <a:t>Team 11</a:t>
-            </a:r>
-          </a:p>
-          <a:p xmlns:a="http://schemas.openxmlformats.org/drawingml/2006/main">
-            <a:pPr>
-              <a:defRPr sz="2100" b="0">
-                <a:solidFill>
-                  <a:srgbClr val="535E6C"/>
-                </a:solidFill>
-                <a:latin typeface="Arial"/>
-                <a:ea typeface="Arial"/>
-                <a:cs typeface="Arial"/>
-              </a:defRPr>
-            </a:pPr>
-            <a:r>
-              <a:rPr sz="2100" b="0">
-                <a:solidFill>
-                  <a:srgbClr val="535E6C"/>
-                </a:solidFill>
-                <a:latin typeface="Arial"/>
-                <a:ea typeface="Arial"/>
-                <a:cs typeface="Arial"/>
-              </a:rPr>
-              <a:t>Course 35-380</a:t>
+              <a:t>Team 11   Course 35-380</a:t>
             </a:r>
           </a:p>
         </p:txBody>
       </p:sp>
-      <p:sp>
-        <p:nvSpPr>
+      <p:graphicFrame>
+        <p:nvGraphicFramePr>
           <p:cNvPr id="3" name="">
             <a:extLst xmlns:a="http://schemas.openxmlformats.org/drawingml/2006/main">
               <a:ext uri="{FF2B5EF4-FFF2-40B4-BE49-F238E27FC236}">
-                <a16:creationId xmlns:a16="http://schemas.microsoft.com/office/drawing/2014/main" id="{F312E1A6-A7F4-41DD-B076-979F1AC03868}"/>
+                <a16:creationId xmlns:a16="http://schemas.microsoft.com/office/drawing/2014/main" id="{A5EEEDC5-8A8C-4E70-BCFE-598B549566CB}"/>
+              </a:ext>
+            </a:extLst>
+          </p:cNvPr>
+          <p:cNvGraphicFramePr/>
+          <p:nvPr/>
+        </p:nvGraphicFramePr>
+        <p:xfrm>
+          <a:off xmlns:a="http://schemas.openxmlformats.org/drawingml/2006/main" x="647700" y="2667000"/>
+          <a:ext xmlns:a="http://schemas.openxmlformats.org/drawingml/2006/main" cx="4476750" cy="2266950"/>
+        </p:xfrm>
+        <a:graphic xmlns:a="http://schemas.openxmlformats.org/drawingml/2006/main">
+          <a:graphicData uri="http://schemas.openxmlformats.org/drawingml/2006/table">
+            <a:tbl>
+              <a:tblPr/>
+              <a:tblGrid>
+                <a:gridCol w="1524000"/>
+                <a:gridCol w="1381125"/>
+                <a:gridCol w="1571625"/>
+              </a:tblGrid>
+              <a:tr h="323850">
+                <a:tc>
+                  <a:txBody>
+                    <a:bodyPr/>
+                    <a:lstStyle/>
+                    <a:p>
+                      <a:r>
+                        <a:rPr sz="1500" b="1">
+                          <a:solidFill>
+                            <a:srgbClr val="18202A"/>
+                          </a:solidFill>
+                          <a:latin typeface="Arial"/>
+                          <a:ea typeface="Arial"/>
+                          <a:cs typeface="Arial"/>
+                        </a:rPr>
+                        <a:t>Student ID</a:t>
+                      </a:r>
+                    </a:p>
+                  </a:txBody>
+                  <a:tcPr marL="91440" marR="91440" marT="45720" marB="45720">
+                    <a:lnL w="9525">
+                      <a:solidFill>
+                        <a:srgbClr val="D9D9D9"/>
+                      </a:solidFill>
+                      <a:prstDash val="solid"/>
+                    </a:lnL>
+                    <a:lnR w="9525">
+                      <a:solidFill>
+                        <a:srgbClr val="D9D9D9"/>
+                      </a:solidFill>
+                      <a:prstDash val="solid"/>
+                    </a:lnR>
+                    <a:lnT w="9525">
+                      <a:solidFill>
+                        <a:srgbClr val="D9D9D9"/>
+                      </a:solidFill>
+                      <a:prstDash val="solid"/>
+                    </a:lnT>
+                    <a:lnB w="9525">
+                      <a:solidFill>
+                        <a:srgbClr val="D9D9D9"/>
+                      </a:solidFill>
+                      <a:prstDash val="solid"/>
+                    </a:lnB>
+                    <a:solidFill>
+                      <a:srgbClr val="E8EDF3"/>
+                    </a:solidFill>
+                  </a:tcPr>
+                </a:tc>
+                <a:tc>
+                  <a:txBody>
+                    <a:bodyPr/>
+                    <a:lstStyle/>
+                    <a:p>
+                      <a:r>
+                        <a:rPr sz="1500" b="1">
+                          <a:solidFill>
+                            <a:srgbClr val="18202A"/>
+                          </a:solidFill>
+                          <a:latin typeface="Arial"/>
+                          <a:ea typeface="Arial"/>
+                          <a:cs typeface="Arial"/>
+                        </a:rPr>
+                        <a:t>Last Name</a:t>
+                      </a:r>
+                    </a:p>
+                  </a:txBody>
+                  <a:tcPr marL="91440" marR="91440" marT="45720" marB="45720">
+                    <a:lnR w="9525">
+                      <a:solidFill>
+                        <a:srgbClr val="D9D9D9"/>
+                      </a:solidFill>
+                      <a:prstDash val="solid"/>
+                    </a:lnR>
+                    <a:lnT w="9525">
+                      <a:solidFill>
+                        <a:srgbClr val="D9D9D9"/>
+                      </a:solidFill>
+                      <a:prstDash val="solid"/>
+                    </a:lnT>
+                    <a:lnB w="9525">
+                      <a:solidFill>
+                        <a:srgbClr val="D9D9D9"/>
+                      </a:solidFill>
+                      <a:prstDash val="solid"/>
+                    </a:lnB>
+                    <a:solidFill>
+                      <a:srgbClr val="E8EDF3"/>
+                    </a:solidFill>
+                  </a:tcPr>
+                </a:tc>
+                <a:tc>
+                  <a:txBody>
+                    <a:bodyPr/>
+                    <a:lstStyle/>
+                    <a:p>
+                      <a:r>
+                        <a:rPr sz="1500" b="1">
+                          <a:solidFill>
+                            <a:srgbClr val="18202A"/>
+                          </a:solidFill>
+                          <a:latin typeface="Arial"/>
+                          <a:ea typeface="Arial"/>
+                          <a:cs typeface="Arial"/>
+                        </a:rPr>
+                        <a:t>First Name</a:t>
+                      </a:r>
+                    </a:p>
+                  </a:txBody>
+                  <a:tcPr marL="91440" marR="91440" marT="45720" marB="45720">
+                    <a:lnR w="9525">
+                      <a:solidFill>
+                        <a:srgbClr val="D9D9D9"/>
+                      </a:solidFill>
+                      <a:prstDash val="solid"/>
+                    </a:lnR>
+                    <a:lnT w="9525">
+                      <a:solidFill>
+                        <a:srgbClr val="D9D9D9"/>
+                      </a:solidFill>
+                      <a:prstDash val="solid"/>
+                    </a:lnT>
+                    <a:lnB w="9525">
+                      <a:solidFill>
+                        <a:srgbClr val="D9D9D9"/>
+                      </a:solidFill>
+                      <a:prstDash val="solid"/>
+                    </a:lnB>
+                    <a:solidFill>
+                      <a:srgbClr val="E8EDF3"/>
+                    </a:solidFill>
+                  </a:tcPr>
+                </a:tc>
+              </a:tr>
+              <a:tr h="323850">
+                <a:tc>
+                  <a:txBody>
+                    <a:bodyPr/>
+                    <a:lstStyle/>
+                    <a:p>
+                      <a:r>
+                        <a:rPr sz="1500" b="0">
+                          <a:solidFill>
+                            <a:srgbClr val="18202A"/>
+                          </a:solidFill>
+                          <a:latin typeface="Arial"/>
+                          <a:ea typeface="Arial"/>
+                          <a:cs typeface="Arial"/>
+                        </a:rPr>
+                        <a:t>D10774184</a:t>
+                      </a:r>
+                    </a:p>
+                  </a:txBody>
+                  <a:tcPr marL="91440" marR="91440" marT="45720" marB="45720">
+                    <a:lnL w="9525">
+                      <a:solidFill>
+                        <a:srgbClr val="D9D9D9"/>
+                      </a:solidFill>
+                      <a:prstDash val="solid"/>
+                    </a:lnL>
+                    <a:lnR w="9525">
+                      <a:solidFill>
+                        <a:srgbClr val="D9D9D9"/>
+                      </a:solidFill>
+                      <a:prstDash val="solid"/>
+                    </a:lnR>
+                    <a:lnB w="9525">
+                      <a:solidFill>
+                        <a:srgbClr val="D9D9D9"/>
+                      </a:solidFill>
+                      <a:prstDash val="solid"/>
+                    </a:lnB>
+                    <a:solidFill>
+                      <a:srgbClr val="FFFFFF"/>
+                    </a:solidFill>
+                  </a:tcPr>
+                </a:tc>
+                <a:tc>
+                  <a:txBody>
+                    <a:bodyPr/>
+                    <a:lstStyle/>
+                    <a:p>
+                      <a:r>
+                        <a:rPr sz="1500" b="0">
+                          <a:solidFill>
+                            <a:srgbClr val="18202A"/>
+                          </a:solidFill>
+                          <a:latin typeface="Arial"/>
+                          <a:ea typeface="Arial"/>
+                          <a:cs typeface="Arial"/>
+                        </a:rPr>
+                        <a:t>Xia</a:t>
+                      </a:r>
+                    </a:p>
+                  </a:txBody>
+                  <a:tcPr marL="91440" marR="91440" marT="45720" marB="45720">
+                    <a:lnR w="9525">
+                      <a:solidFill>
+                        <a:srgbClr val="D9D9D9"/>
+                      </a:solidFill>
+                      <a:prstDash val="solid"/>
+                    </a:lnR>
+                    <a:lnB w="9525">
+                      <a:solidFill>
+                        <a:srgbClr val="D9D9D9"/>
+                      </a:solidFill>
+                      <a:prstDash val="solid"/>
+                    </a:lnB>
+                    <a:solidFill>
+                      <a:srgbClr val="FFFFFF"/>
+                    </a:solidFill>
+                  </a:tcPr>
+                </a:tc>
+                <a:tc>
+                  <a:txBody>
+                    <a:bodyPr/>
+                    <a:lstStyle/>
+                    <a:p>
+                      <a:r>
+                        <a:rPr sz="1500" b="0">
+                          <a:solidFill>
+                            <a:srgbClr val="18202A"/>
+                          </a:solidFill>
+                          <a:latin typeface="Arial"/>
+                          <a:ea typeface="Arial"/>
+                          <a:cs typeface="Arial"/>
+                        </a:rPr>
+                        <a:t>Zimeng</a:t>
+                      </a:r>
+                    </a:p>
+                  </a:txBody>
+                  <a:tcPr marL="91440" marR="91440" marT="45720" marB="45720">
+                    <a:lnR w="9525">
+                      <a:solidFill>
+                        <a:srgbClr val="D9D9D9"/>
+                      </a:solidFill>
+                      <a:prstDash val="solid"/>
+                    </a:lnR>
+                    <a:lnB w="9525">
+                      <a:solidFill>
+                        <a:srgbClr val="D9D9D9"/>
+                      </a:solidFill>
+                      <a:prstDash val="solid"/>
+                    </a:lnB>
+                    <a:solidFill>
+                      <a:srgbClr val="FFFFFF"/>
+                    </a:solidFill>
+                  </a:tcPr>
+                </a:tc>
+              </a:tr>
+              <a:tr h="323850">
+                <a:tc>
+                  <a:txBody>
+                    <a:bodyPr/>
+                    <a:lstStyle/>
+                    <a:p>
+                      <a:r>
+                        <a:rPr sz="1500" b="0">
+                          <a:solidFill>
+                            <a:srgbClr val="18202A"/>
+                          </a:solidFill>
+                          <a:latin typeface="Arial"/>
+                          <a:ea typeface="Arial"/>
+                          <a:cs typeface="Arial"/>
+                        </a:rPr>
+                        <a:t>D10773951</a:t>
+                      </a:r>
+                    </a:p>
+                  </a:txBody>
+                  <a:tcPr marL="91440" marR="91440" marT="45720" marB="45720">
+                    <a:lnL w="9525">
+                      <a:solidFill>
+                        <a:srgbClr val="D9D9D9"/>
+                      </a:solidFill>
+                      <a:prstDash val="solid"/>
+                    </a:lnL>
+                    <a:lnR w="9525">
+                      <a:solidFill>
+                        <a:srgbClr val="D9D9D9"/>
+                      </a:solidFill>
+                      <a:prstDash val="solid"/>
+                    </a:lnR>
+                    <a:lnB w="9525">
+                      <a:solidFill>
+                        <a:srgbClr val="D9D9D9"/>
+                      </a:solidFill>
+                      <a:prstDash val="solid"/>
+                    </a:lnB>
+                    <a:solidFill>
+                      <a:srgbClr val="F5F7F9"/>
+                    </a:solidFill>
+                  </a:tcPr>
+                </a:tc>
+                <a:tc>
+                  <a:txBody>
+                    <a:bodyPr/>
+                    <a:lstStyle/>
+                    <a:p>
+                      <a:r>
+                        <a:rPr sz="1500" b="0">
+                          <a:solidFill>
+                            <a:srgbClr val="18202A"/>
+                          </a:solidFill>
+                          <a:latin typeface="Arial"/>
+                          <a:ea typeface="Arial"/>
+                          <a:cs typeface="Arial"/>
+                        </a:rPr>
+                        <a:t>Chen</a:t>
+                      </a:r>
+                    </a:p>
+                  </a:txBody>
+                  <a:tcPr marL="91440" marR="91440" marT="45720" marB="45720">
+                    <a:lnR w="9525">
+                      <a:solidFill>
+                        <a:srgbClr val="D9D9D9"/>
+                      </a:solidFill>
+                      <a:prstDash val="solid"/>
+                    </a:lnR>
+                    <a:lnB w="9525">
+                      <a:solidFill>
+                        <a:srgbClr val="D9D9D9"/>
+                      </a:solidFill>
+                      <a:prstDash val="solid"/>
+                    </a:lnB>
+                    <a:solidFill>
+                      <a:srgbClr val="F5F7F9"/>
+                    </a:solidFill>
+                  </a:tcPr>
+                </a:tc>
+                <a:tc>
+                  <a:txBody>
+                    <a:bodyPr/>
+                    <a:lstStyle/>
+                    <a:p>
+                      <a:r>
+                        <a:rPr sz="1500" b="0">
+                          <a:solidFill>
+                            <a:srgbClr val="18202A"/>
+                          </a:solidFill>
+                          <a:latin typeface="Arial"/>
+                          <a:ea typeface="Arial"/>
+                          <a:cs typeface="Arial"/>
+                        </a:rPr>
+                        <a:t>Botao</a:t>
+                      </a:r>
+                    </a:p>
+                  </a:txBody>
+                  <a:tcPr marL="91440" marR="91440" marT="45720" marB="45720">
+                    <a:lnR w="9525">
+                      <a:solidFill>
+                        <a:srgbClr val="D9D9D9"/>
+                      </a:solidFill>
+                      <a:prstDash val="solid"/>
+                    </a:lnR>
+                    <a:lnB w="9525">
+                      <a:solidFill>
+                        <a:srgbClr val="D9D9D9"/>
+                      </a:solidFill>
+                      <a:prstDash val="solid"/>
+                    </a:lnB>
+                    <a:solidFill>
+                      <a:srgbClr val="F5F7F9"/>
+                    </a:solidFill>
+                  </a:tcPr>
+                </a:tc>
+              </a:tr>
+              <a:tr h="323850">
+                <a:tc>
+                  <a:txBody>
+                    <a:bodyPr/>
+                    <a:lstStyle/>
+                    <a:p>
+                      <a:r>
+                        <a:rPr sz="1500" b="0">
+                          <a:solidFill>
+                            <a:srgbClr val="18202A"/>
+                          </a:solidFill>
+                          <a:latin typeface="Arial"/>
+                          <a:ea typeface="Arial"/>
+                          <a:cs typeface="Arial"/>
+                        </a:rPr>
+                        <a:t>D10773959</a:t>
+                      </a:r>
+                    </a:p>
+                  </a:txBody>
+                  <a:tcPr marL="91440" marR="91440" marT="45720" marB="45720">
+                    <a:lnL w="9525">
+                      <a:solidFill>
+                        <a:srgbClr val="D9D9D9"/>
+                      </a:solidFill>
+                      <a:prstDash val="solid"/>
+                    </a:lnL>
+                    <a:lnR w="9525">
+                      <a:solidFill>
+                        <a:srgbClr val="D9D9D9"/>
+                      </a:solidFill>
+                      <a:prstDash val="solid"/>
+                    </a:lnR>
+                    <a:lnB w="9525">
+                      <a:solidFill>
+                        <a:srgbClr val="D9D9D9"/>
+                      </a:solidFill>
+                      <a:prstDash val="solid"/>
+                    </a:lnB>
+                    <a:solidFill>
+                      <a:srgbClr val="FFFFFF"/>
+                    </a:solidFill>
+                  </a:tcPr>
+                </a:tc>
+                <a:tc>
+                  <a:txBody>
+                    <a:bodyPr/>
+                    <a:lstStyle/>
+                    <a:p>
+                      <a:r>
+                        <a:rPr sz="1500" b="0">
+                          <a:solidFill>
+                            <a:srgbClr val="18202A"/>
+                          </a:solidFill>
+                          <a:latin typeface="Arial"/>
+                          <a:ea typeface="Arial"/>
+                          <a:cs typeface="Arial"/>
+                        </a:rPr>
+                        <a:t>Cui</a:t>
+                      </a:r>
+                    </a:p>
+                  </a:txBody>
+                  <a:tcPr marL="91440" marR="91440" marT="45720" marB="45720">
+                    <a:lnR w="9525">
+                      <a:solidFill>
+                        <a:srgbClr val="D9D9D9"/>
+                      </a:solidFill>
+                      <a:prstDash val="solid"/>
+                    </a:lnR>
+                    <a:lnB w="9525">
+                      <a:solidFill>
+                        <a:srgbClr val="D9D9D9"/>
+                      </a:solidFill>
+                      <a:prstDash val="solid"/>
+                    </a:lnB>
+                    <a:solidFill>
+                      <a:srgbClr val="FFFFFF"/>
+                    </a:solidFill>
+                  </a:tcPr>
+                </a:tc>
+                <a:tc>
+                  <a:txBody>
+                    <a:bodyPr/>
+                    <a:lstStyle/>
+                    <a:p>
+                      <a:r>
+                        <a:rPr sz="1500" b="0">
+                          <a:solidFill>
+                            <a:srgbClr val="18202A"/>
+                          </a:solidFill>
+                          <a:latin typeface="Arial"/>
+                          <a:ea typeface="Arial"/>
+                          <a:cs typeface="Arial"/>
+                        </a:rPr>
+                        <a:t>Wenzhi</a:t>
+                      </a:r>
+                    </a:p>
+                  </a:txBody>
+                  <a:tcPr marL="91440" marR="91440" marT="45720" marB="45720">
+                    <a:lnR w="9525">
+                      <a:solidFill>
+                        <a:srgbClr val="D9D9D9"/>
+                      </a:solidFill>
+                      <a:prstDash val="solid"/>
+                    </a:lnR>
+                    <a:lnB w="9525">
+                      <a:solidFill>
+                        <a:srgbClr val="D9D9D9"/>
+                      </a:solidFill>
+                      <a:prstDash val="solid"/>
+                    </a:lnB>
+                    <a:solidFill>
+                      <a:srgbClr val="FFFFFF"/>
+                    </a:solidFill>
+                  </a:tcPr>
+                </a:tc>
+              </a:tr>
+              <a:tr h="323850">
+                <a:tc>
+                  <a:txBody>
+                    <a:bodyPr/>
+                    <a:lstStyle/>
+                    <a:p>
+                      <a:r>
+                        <a:rPr sz="1500" b="0">
+                          <a:solidFill>
+                            <a:srgbClr val="18202A"/>
+                          </a:solidFill>
+                          <a:latin typeface="Arial"/>
+                          <a:ea typeface="Arial"/>
+                          <a:cs typeface="Arial"/>
+                        </a:rPr>
+                        <a:t>D10774061</a:t>
+                      </a:r>
+                    </a:p>
+                  </a:txBody>
+                  <a:tcPr marL="91440" marR="91440" marT="45720" marB="45720">
+                    <a:lnL w="9525">
+                      <a:solidFill>
+                        <a:srgbClr val="D9D9D9"/>
+                      </a:solidFill>
+                      <a:prstDash val="solid"/>
+                    </a:lnL>
+                    <a:lnR w="9525">
+                      <a:solidFill>
+                        <a:srgbClr val="D9D9D9"/>
+                      </a:solidFill>
+                      <a:prstDash val="solid"/>
+                    </a:lnR>
+                    <a:lnB w="9525">
+                      <a:solidFill>
+                        <a:srgbClr val="D9D9D9"/>
+                      </a:solidFill>
+                      <a:prstDash val="solid"/>
+                    </a:lnB>
+                    <a:solidFill>
+                      <a:srgbClr val="F5F7F9"/>
+                    </a:solidFill>
+                  </a:tcPr>
+                </a:tc>
+                <a:tc>
+                  <a:txBody>
+                    <a:bodyPr/>
+                    <a:lstStyle/>
+                    <a:p>
+                      <a:r>
+                        <a:rPr sz="1500" b="0">
+                          <a:solidFill>
+                            <a:srgbClr val="18202A"/>
+                          </a:solidFill>
+                          <a:latin typeface="Arial"/>
+                          <a:ea typeface="Arial"/>
+                          <a:cs typeface="Arial"/>
+                        </a:rPr>
+                        <a:t>Luo</a:t>
+                      </a:r>
+                    </a:p>
+                  </a:txBody>
+                  <a:tcPr marL="91440" marR="91440" marT="45720" marB="45720">
+                    <a:lnR w="9525">
+                      <a:solidFill>
+                        <a:srgbClr val="D9D9D9"/>
+                      </a:solidFill>
+                      <a:prstDash val="solid"/>
+                    </a:lnR>
+                    <a:lnB w="9525">
+                      <a:solidFill>
+                        <a:srgbClr val="D9D9D9"/>
+                      </a:solidFill>
+                      <a:prstDash val="solid"/>
+                    </a:lnB>
+                    <a:solidFill>
+                      <a:srgbClr val="F5F7F9"/>
+                    </a:solidFill>
+                  </a:tcPr>
+                </a:tc>
+                <a:tc>
+                  <a:txBody>
+                    <a:bodyPr/>
+                    <a:lstStyle/>
+                    <a:p>
+                      <a:r>
+                        <a:rPr sz="1500" b="0">
+                          <a:solidFill>
+                            <a:srgbClr val="18202A"/>
+                          </a:solidFill>
+                          <a:latin typeface="Arial"/>
+                          <a:ea typeface="Arial"/>
+                          <a:cs typeface="Arial"/>
+                        </a:rPr>
+                        <a:t>Yiqin</a:t>
+                      </a:r>
+                    </a:p>
+                  </a:txBody>
+                  <a:tcPr marL="91440" marR="91440" marT="45720" marB="45720">
+                    <a:lnR w="9525">
+                      <a:solidFill>
+                        <a:srgbClr val="D9D9D9"/>
+                      </a:solidFill>
+                      <a:prstDash val="solid"/>
+                    </a:lnR>
+                    <a:lnB w="9525">
+                      <a:solidFill>
+                        <a:srgbClr val="D9D9D9"/>
+                      </a:solidFill>
+                      <a:prstDash val="solid"/>
+                    </a:lnB>
+                    <a:solidFill>
+                      <a:srgbClr val="F5F7F9"/>
+                    </a:solidFill>
+                  </a:tcPr>
+                </a:tc>
+              </a:tr>
+              <a:tr h="323850">
+                <a:tc>
+                  <a:txBody>
+                    <a:bodyPr/>
+                    <a:lstStyle/>
+                    <a:p>
+                      <a:r>
+                        <a:rPr sz="1500" b="0">
+                          <a:solidFill>
+                            <a:srgbClr val="18202A"/>
+                          </a:solidFill>
+                          <a:latin typeface="Arial"/>
+                          <a:ea typeface="Arial"/>
+                          <a:cs typeface="Arial"/>
+                        </a:rPr>
+                        <a:t>D10774076</a:t>
+                      </a:r>
+                    </a:p>
+                  </a:txBody>
+                  <a:tcPr marL="91440" marR="91440" marT="45720" marB="45720">
+                    <a:lnL w="9525">
+                      <a:solidFill>
+                        <a:srgbClr val="D9D9D9"/>
+                      </a:solidFill>
+                      <a:prstDash val="solid"/>
+                    </a:lnL>
+                    <a:lnR w="9525">
+                      <a:solidFill>
+                        <a:srgbClr val="D9D9D9"/>
+                      </a:solidFill>
+                      <a:prstDash val="solid"/>
+                    </a:lnR>
+                    <a:lnB w="9525">
+                      <a:solidFill>
+                        <a:srgbClr val="D9D9D9"/>
+                      </a:solidFill>
+                      <a:prstDash val="solid"/>
+                    </a:lnB>
+                    <a:solidFill>
+                      <a:srgbClr val="FFFFFF"/>
+                    </a:solidFill>
+                  </a:tcPr>
+                </a:tc>
+                <a:tc>
+                  <a:txBody>
+                    <a:bodyPr/>
+                    <a:lstStyle/>
+                    <a:p>
+                      <a:r>
+                        <a:rPr sz="1500" b="0">
+                          <a:solidFill>
+                            <a:srgbClr val="18202A"/>
+                          </a:solidFill>
+                          <a:latin typeface="Arial"/>
+                          <a:ea typeface="Arial"/>
+                          <a:cs typeface="Arial"/>
+                        </a:rPr>
+                        <a:t>Yang</a:t>
+                      </a:r>
+                    </a:p>
+                  </a:txBody>
+                  <a:tcPr marL="91440" marR="91440" marT="45720" marB="45720">
+                    <a:lnR w="9525">
+                      <a:solidFill>
+                        <a:srgbClr val="D9D9D9"/>
+                      </a:solidFill>
+                      <a:prstDash val="solid"/>
+                    </a:lnR>
+                    <a:lnB w="9525">
+                      <a:solidFill>
+                        <a:srgbClr val="D9D9D9"/>
+                      </a:solidFill>
+                      <a:prstDash val="solid"/>
+                    </a:lnB>
+                    <a:solidFill>
+                      <a:srgbClr val="FFFFFF"/>
+                    </a:solidFill>
+                  </a:tcPr>
+                </a:tc>
+                <a:tc>
+                  <a:txBody>
+                    <a:bodyPr/>
+                    <a:lstStyle/>
+                    <a:p>
+                      <a:r>
+                        <a:rPr sz="1500" b="0">
+                          <a:solidFill>
+                            <a:srgbClr val="18202A"/>
+                          </a:solidFill>
+                          <a:latin typeface="Arial"/>
+                          <a:ea typeface="Arial"/>
+                          <a:cs typeface="Arial"/>
+                        </a:rPr>
+                        <a:t>Miaomiao</a:t>
+                      </a:r>
+                    </a:p>
+                  </a:txBody>
+                  <a:tcPr marL="91440" marR="91440" marT="45720" marB="45720">
+                    <a:lnR w="9525">
+                      <a:solidFill>
+                        <a:srgbClr val="D9D9D9"/>
+                      </a:solidFill>
+                      <a:prstDash val="solid"/>
+                    </a:lnR>
+                    <a:lnB w="9525">
+                      <a:solidFill>
+                        <a:srgbClr val="D9D9D9"/>
+                      </a:solidFill>
+                      <a:prstDash val="solid"/>
+                    </a:lnB>
+                    <a:solidFill>
+                      <a:srgbClr val="FFFFFF"/>
+                    </a:solidFill>
+                  </a:tcPr>
+                </a:tc>
+              </a:tr>
+              <a:tr h="323850">
+                <a:tc>
+                  <a:txBody>
+                    <a:bodyPr/>
+                    <a:lstStyle/>
+                    <a:p>
+                      <a:r>
+                        <a:rPr sz="1500" b="0">
+                          <a:solidFill>
+                            <a:srgbClr val="18202A"/>
+                          </a:solidFill>
+                          <a:latin typeface="Arial"/>
+                          <a:ea typeface="Arial"/>
+                          <a:cs typeface="Arial"/>
+                        </a:rPr>
+                        <a:t>D10774175</a:t>
+                      </a:r>
+                    </a:p>
+                  </a:txBody>
+                  <a:tcPr marL="91440" marR="91440" marT="45720" marB="45720">
+                    <a:lnL w="9525">
+                      <a:solidFill>
+                        <a:srgbClr val="D9D9D9"/>
+                      </a:solidFill>
+                      <a:prstDash val="solid"/>
+                    </a:lnL>
+                    <a:lnR w="9525">
+                      <a:solidFill>
+                        <a:srgbClr val="D9D9D9"/>
+                      </a:solidFill>
+                      <a:prstDash val="solid"/>
+                    </a:lnR>
+                    <a:lnB w="9525">
+                      <a:solidFill>
+                        <a:srgbClr val="D9D9D9"/>
+                      </a:solidFill>
+                      <a:prstDash val="solid"/>
+                    </a:lnB>
+                    <a:solidFill>
+                      <a:srgbClr val="F5F7F9"/>
+                    </a:solidFill>
+                  </a:tcPr>
+                </a:tc>
+                <a:tc>
+                  <a:txBody>
+                    <a:bodyPr/>
+                    <a:lstStyle/>
+                    <a:p>
+                      <a:r>
+                        <a:rPr sz="1500" b="0">
+                          <a:solidFill>
+                            <a:srgbClr val="18202A"/>
+                          </a:solidFill>
+                          <a:latin typeface="Arial"/>
+                          <a:ea typeface="Arial"/>
+                          <a:cs typeface="Arial"/>
+                        </a:rPr>
+                        <a:t>Wu</a:t>
+                      </a:r>
+                    </a:p>
+                  </a:txBody>
+                  <a:tcPr marL="91440" marR="91440" marT="45720" marB="45720">
+                    <a:lnR w="9525">
+                      <a:solidFill>
+                        <a:srgbClr val="D9D9D9"/>
+                      </a:solidFill>
+                      <a:prstDash val="solid"/>
+                    </a:lnR>
+                    <a:lnB w="9525">
+                      <a:solidFill>
+                        <a:srgbClr val="D9D9D9"/>
+                      </a:solidFill>
+                      <a:prstDash val="solid"/>
+                    </a:lnB>
+                    <a:solidFill>
+                      <a:srgbClr val="F5F7F9"/>
+                    </a:solidFill>
+                  </a:tcPr>
+                </a:tc>
+                <a:tc>
+                  <a:txBody>
+                    <a:bodyPr/>
+                    <a:lstStyle/>
+                    <a:p>
+                      <a:r>
+                        <a:rPr sz="1500" b="0">
+                          <a:solidFill>
+                            <a:srgbClr val="18202A"/>
+                          </a:solidFill>
+                          <a:latin typeface="Arial"/>
+                          <a:ea typeface="Arial"/>
+                          <a:cs typeface="Arial"/>
+                        </a:rPr>
+                        <a:t>Han</a:t>
+                      </a:r>
+                    </a:p>
+                  </a:txBody>
+                  <a:tcPr marL="91440" marR="91440" marT="45720" marB="45720">
+                    <a:lnR w="9525">
+                      <a:solidFill>
+                        <a:srgbClr val="D9D9D9"/>
+                      </a:solidFill>
+                      <a:prstDash val="solid"/>
+                    </a:lnR>
+                    <a:lnB w="9525">
+                      <a:solidFill>
+                        <a:srgbClr val="D9D9D9"/>
+                      </a:solidFill>
+                      <a:prstDash val="solid"/>
+                    </a:lnB>
+                    <a:solidFill>
+                      <a:srgbClr val="F5F7F9"/>
+                    </a:solidFill>
+                  </a:tcPr>
+                </a:tc>
+              </a:tr>
+            </a:tbl>
+          </a:graphicData>
+        </a:graphic>
+      </p:graphicFrame>
+      <p:sp>
+        <p:nvSpPr>
+          <p:cNvPr id="4" name="">
+            <a:extLst xmlns:a="http://schemas.openxmlformats.org/drawingml/2006/main">
+              <a:ext uri="{FF2B5EF4-FFF2-40B4-BE49-F238E27FC236}">
+                <a16:creationId xmlns:a16="http://schemas.microsoft.com/office/drawing/2014/main" id="{8E8BAB93-95A0-40B7-84FB-739E043CA377}"/>
               </a:ext>
             </a:extLst>
           </p:cNvPr>
@@ -8908,8 +9744,8 @@
         </p:nvSpPr>
         <p:spPr>
           <a:xfrm xmlns:a="http://schemas.openxmlformats.org/drawingml/2006/main">
-            <a:off x="647700" y="3381375"/>
-            <a:ext cx="4000500" cy="904875"/>
+            <a:off x="647700" y="5143500"/>
+            <a:ext cx="4476750" cy="571500"/>
           </a:xfrm>
           <a:prstGeom xmlns:a="http://schemas.openxmlformats.org/drawingml/2006/main" prst="rect">
             <a:avLst/>
@@ -8925,7 +9761,7 @@
           </a:bodyPr>
           <a:lstStyle xmlns:a="http://schemas.openxmlformats.org/drawingml/2006/main">
             <a:defPPr>
-              <a:defRPr sz="5400" b="1">
+              <a:defRPr sz="3900" b="1">
                 <a:solidFill>
                   <a:srgbClr val="245BC2"/>
                 </a:solidFill>
@@ -8935,7 +9771,7 @@
               </a:defRPr>
             </a:defPPr>
             <a:lvl1pPr>
-              <a:defRPr sz="5400" b="1">
+              <a:defRPr sz="3900" b="1">
                 <a:solidFill>
                   <a:srgbClr val="245BC2"/>
                 </a:solidFill>
@@ -8945,7 +9781,7 @@
               </a:defRPr>
             </a:lvl1pPr>
             <a:lvl2pPr>
-              <a:defRPr sz="5400" b="1">
+              <a:defRPr sz="3900" b="1">
                 <a:solidFill>
                   <a:srgbClr val="245BC2"/>
                 </a:solidFill>
@@ -8955,7 +9791,7 @@
               </a:defRPr>
             </a:lvl2pPr>
             <a:lvl3pPr>
-              <a:defRPr sz="5400" b="1">
+              <a:defRPr sz="3900" b="1">
                 <a:solidFill>
                   <a:srgbClr val="245BC2"/>
                 </a:solidFill>
@@ -8965,7 +9801,7 @@
               </a:defRPr>
             </a:lvl3pPr>
             <a:lvl4pPr>
-              <a:defRPr sz="5400" b="1">
+              <a:defRPr sz="3900" b="1">
                 <a:solidFill>
                   <a:srgbClr val="245BC2"/>
                 </a:solidFill>
@@ -8975,7 +9811,7 @@
               </a:defRPr>
             </a:lvl4pPr>
             <a:lvl5pPr>
-              <a:defRPr sz="5400" b="1">
+              <a:defRPr sz="3900" b="1">
                 <a:solidFill>
                   <a:srgbClr val="245BC2"/>
                 </a:solidFill>
@@ -8985,7 +9821,7 @@
               </a:defRPr>
             </a:lvl5pPr>
             <a:lvl6pPr>
-              <a:defRPr sz="5400" b="1">
+              <a:defRPr sz="3900" b="1">
                 <a:solidFill>
                   <a:srgbClr val="245BC2"/>
                 </a:solidFill>
@@ -8995,7 +9831,7 @@
               </a:defRPr>
             </a:lvl6pPr>
             <a:lvl7pPr>
-              <a:defRPr sz="5400" b="1">
+              <a:defRPr sz="3900" b="1">
                 <a:solidFill>
                   <a:srgbClr val="245BC2"/>
                 </a:solidFill>
@@ -9005,7 +9841,7 @@
               </a:defRPr>
             </a:lvl7pPr>
             <a:lvl8pPr>
-              <a:defRPr sz="5400" b="1">
+              <a:defRPr sz="3900" b="1">
                 <a:solidFill>
                   <a:srgbClr val="245BC2"/>
                 </a:solidFill>
@@ -9015,7 +9851,7 @@
               </a:defRPr>
             </a:lvl8pPr>
             <a:lvl9pPr>
-              <a:defRPr sz="5400" b="1">
+              <a:defRPr sz="3900" b="1">
                 <a:solidFill>
                   <a:srgbClr val="245BC2"/>
                 </a:solidFill>
@@ -9027,7 +9863,7 @@
           </a:lstStyle>
           <a:p xmlns:a="http://schemas.openxmlformats.org/drawingml/2006/main">
             <a:pPr>
-              <a:defRPr sz="5400" b="1">
+              <a:defRPr sz="3900" b="1">
                 <a:solidFill>
                   <a:srgbClr val="245BC2"/>
                 </a:solidFill>
@@ -9037,7 +9873,7 @@
               </a:defRPr>
             </a:pPr>
             <a:r>
-              <a:rPr sz="5400" b="1">
+              <a:rPr sz="3900" b="1">
                 <a:solidFill>
                   <a:srgbClr val="245BC2"/>
                 </a:solidFill>
@@ -9052,10 +9888,10 @@
       </p:sp>
       <p:sp>
         <p:nvSpPr>
-          <p:cNvPr id="4" name="">
+          <p:cNvPr id="5" name="">
             <a:extLst xmlns:a="http://schemas.openxmlformats.org/drawingml/2006/main">
               <a:ext uri="{FF2B5EF4-FFF2-40B4-BE49-F238E27FC236}">
-                <a16:creationId xmlns:a16="http://schemas.microsoft.com/office/drawing/2014/main" id="{31BB1F02-D55E-47D5-BAAD-79C646D0591F}"/>
+                <a16:creationId xmlns:a16="http://schemas.microsoft.com/office/drawing/2014/main" id="{B2889078-BF46-4F0F-8DF9-F175DCBD5528}"/>
               </a:ext>
             </a:extLst>
           </p:cNvPr>
@@ -9066,8 +9902,8 @@
         </p:nvSpPr>
         <p:spPr>
           <a:xfrm xmlns:a="http://schemas.openxmlformats.org/drawingml/2006/main">
-            <a:off x="666750" y="4362450"/>
-            <a:ext cx="4238625" cy="857250"/>
+            <a:off x="666750" y="5810250"/>
+            <a:ext cx="4476750" cy="514350"/>
           </a:xfrm>
           <a:prstGeom xmlns:a="http://schemas.openxmlformats.org/drawingml/2006/main" prst="rect">
             <a:avLst/>
@@ -9083,7 +9919,7 @@
           </a:bodyPr>
           <a:lstStyle xmlns:a="http://schemas.openxmlformats.org/drawingml/2006/main">
             <a:defPPr>
-              <a:defRPr sz="2025" b="0">
+              <a:defRPr sz="1650" b="0">
                 <a:solidFill>
                   <a:srgbClr val="18202A"/>
                 </a:solidFill>
@@ -9093,7 +9929,7 @@
               </a:defRPr>
             </a:defPPr>
             <a:lvl1pPr>
-              <a:defRPr sz="2025" b="0">
+              <a:defRPr sz="1650" b="0">
                 <a:solidFill>
                   <a:srgbClr val="18202A"/>
                 </a:solidFill>
@@ -9103,7 +9939,7 @@
               </a:defRPr>
             </a:lvl1pPr>
             <a:lvl2pPr>
-              <a:defRPr sz="2025" b="0">
+              <a:defRPr sz="1650" b="0">
                 <a:solidFill>
                   <a:srgbClr val="18202A"/>
                 </a:solidFill>
@@ -9113,7 +9949,7 @@
               </a:defRPr>
             </a:lvl2pPr>
             <a:lvl3pPr>
-              <a:defRPr sz="2025" b="0">
+              <a:defRPr sz="1650" b="0">
                 <a:solidFill>
                   <a:srgbClr val="18202A"/>
                 </a:solidFill>
@@ -9123,7 +9959,7 @@
               </a:defRPr>
             </a:lvl3pPr>
             <a:lvl4pPr>
-              <a:defRPr sz="2025" b="0">
+              <a:defRPr sz="1650" b="0">
                 <a:solidFill>
                   <a:srgbClr val="18202A"/>
                 </a:solidFill>
@@ -9133,7 +9969,7 @@
               </a:defRPr>
             </a:lvl4pPr>
             <a:lvl5pPr>
-              <a:defRPr sz="2025" b="0">
+              <a:defRPr sz="1650" b="0">
                 <a:solidFill>
                   <a:srgbClr val="18202A"/>
                 </a:solidFill>
@@ -9143,7 +9979,7 @@
               </a:defRPr>
             </a:lvl5pPr>
             <a:lvl6pPr>
-              <a:defRPr sz="2025" b="0">
+              <a:defRPr sz="1650" b="0">
                 <a:solidFill>
                   <a:srgbClr val="18202A"/>
                 </a:solidFill>
@@ -9153,7 +9989,7 @@
               </a:defRPr>
             </a:lvl6pPr>
             <a:lvl7pPr>
-              <a:defRPr sz="2025" b="0">
+              <a:defRPr sz="1650" b="0">
                 <a:solidFill>
                   <a:srgbClr val="18202A"/>
                 </a:solidFill>
@@ -9163,7 +9999,7 @@
               </a:defRPr>
             </a:lvl7pPr>
             <a:lvl8pPr>
-              <a:defRPr sz="2025" b="0">
+              <a:defRPr sz="1650" b="0">
                 <a:solidFill>
                   <a:srgbClr val="18202A"/>
                 </a:solidFill>
@@ -9173,7 +10009,7 @@
               </a:defRPr>
             </a:lvl8pPr>
             <a:lvl9pPr>
-              <a:defRPr sz="2025" b="0">
+              <a:defRPr sz="1650" b="0">
                 <a:solidFill>
                   <a:srgbClr val="18202A"/>
                 </a:solidFill>
@@ -9185,7 +10021,7 @@
           </a:lstStyle>
           <a:p xmlns:a="http://schemas.openxmlformats.org/drawingml/2006/main">
             <a:pPr>
-              <a:defRPr sz="2025" b="0">
+              <a:defRPr sz="1650" b="0">
                 <a:solidFill>
                   <a:srgbClr val="18202A"/>
                 </a:solidFill>
@@ -9195,7 +10031,7 @@
               </a:defRPr>
             </a:pPr>
             <a:r>
-              <a:rPr sz="2025" b="0">
+              <a:rPr sz="1650" b="0">
                 <a:solidFill>
                   <a:srgbClr val="18202A"/>
                 </a:solidFill>
@@ -9208,7 +10044,7 @@
           </a:p>
           <a:p xmlns:a="http://schemas.openxmlformats.org/drawingml/2006/main">
             <a:pPr>
-              <a:defRPr sz="2025" b="0">
+              <a:defRPr sz="1650" b="0">
                 <a:solidFill>
                   <a:srgbClr val="18202A"/>
                 </a:solidFill>
@@ -9218,7 +10054,7 @@
               </a:defRPr>
             </a:pPr>
             <a:r>
-              <a:rPr sz="2025" b="0">
+              <a:rPr sz="1650" b="0">
                 <a:solidFill>
                   <a:srgbClr val="18202A"/>
                 </a:solidFill>
@@ -9233,10 +10069,10 @@
       </p:sp>
       <p:pic>
         <p:nvPicPr>
-          <p:cNvPr id="5" name="">
+          <p:cNvPr id="6" name="">
             <a:extLst xmlns:a="http://schemas.openxmlformats.org/drawingml/2006/main">
               <a:ext uri="{FF2B5EF4-FFF2-40B4-BE49-F238E27FC236}">
-                <a16:creationId xmlns:a16="http://schemas.microsoft.com/office/drawing/2014/main" id="{D8313FA8-1701-493E-8A7F-5539A5068CE3}"/>
+                <a16:creationId xmlns:a16="http://schemas.microsoft.com/office/drawing/2014/main" id="{79D271C3-A476-4497-8652-5ED6C84F4054}"/>
               </a:ext>
             </a:extLst>
           </p:cNvPr>
@@ -9246,7 +10082,7 @@
           <p:nvPr/>
         </p:nvPicPr>
         <p:blipFill>
-          <a:blip xmlns:r="http://schemas.openxmlformats.org/officeDocument/2006/relationships" xmlns:a="http://schemas.openxmlformats.org/drawingml/2006/main" r:embed="Rf513bbcbd78d4780"/>
+          <a:blip xmlns:r="http://schemas.openxmlformats.org/officeDocument/2006/relationships" xmlns:a="http://schemas.openxmlformats.org/drawingml/2006/main" r:embed="R76f96aea077341ab"/>
           <a:stretch xmlns:a="http://schemas.openxmlformats.org/drawingml/2006/main"/>
         </p:blipFill>
         <p:spPr>
@@ -9261,10 +10097,10 @@
       </p:pic>
       <p:sp>
         <p:nvSpPr>
-          <p:cNvPr id="6" name="">
+          <p:cNvPr id="7" name="">
             <a:extLst xmlns:a="http://schemas.openxmlformats.org/drawingml/2006/main">
               <a:ext uri="{FF2B5EF4-FFF2-40B4-BE49-F238E27FC236}">
-                <a16:creationId xmlns:a16="http://schemas.microsoft.com/office/drawing/2014/main" id="{A3BB58DA-83F2-4776-9BCB-44EA7C55FB28}"/>
+                <a16:creationId xmlns:a16="http://schemas.microsoft.com/office/drawing/2014/main" id="{71947B68-41C9-4FE0-8A00-01CEA2B09167}"/>
               </a:ext>
             </a:extLst>
           </p:cNvPr>
@@ -9275,8 +10111,8 @@
         </p:nvSpPr>
         <p:spPr>
           <a:xfrm xmlns:a="http://schemas.openxmlformats.org/drawingml/2006/main">
-            <a:off x="647700" y="6057900"/>
-            <a:ext cx="10668000" cy="428625"/>
+            <a:off x="647700" y="6457950"/>
+            <a:ext cx="10668000" cy="276225"/>
           </a:xfrm>
           <a:prstGeom xmlns:a="http://schemas.openxmlformats.org/drawingml/2006/main" prst="rect">
             <a:avLst/>
@@ -9292,7 +10128,7 @@
           </a:bodyPr>
           <a:lstStyle xmlns:a="http://schemas.openxmlformats.org/drawingml/2006/main">
             <a:defPPr>
-              <a:defRPr sz="1875" b="0">
+              <a:defRPr sz="1425" b="0">
                 <a:solidFill>
                   <a:srgbClr val="535E6C"/>
                 </a:solidFill>
@@ -9302,7 +10138,7 @@
               </a:defRPr>
             </a:defPPr>
             <a:lvl1pPr>
-              <a:defRPr sz="1875" b="0">
+              <a:defRPr sz="1425" b="0">
                 <a:solidFill>
                   <a:srgbClr val="535E6C"/>
                 </a:solidFill>
@@ -9312,7 +10148,7 @@
               </a:defRPr>
             </a:lvl1pPr>
             <a:lvl2pPr>
-              <a:defRPr sz="1875" b="0">
+              <a:defRPr sz="1425" b="0">
                 <a:solidFill>
                   <a:srgbClr val="535E6C"/>
                 </a:solidFill>
@@ -9322,7 +10158,7 @@
               </a:defRPr>
             </a:lvl2pPr>
             <a:lvl3pPr>
-              <a:defRPr sz="1875" b="0">
+              <a:defRPr sz="1425" b="0">
                 <a:solidFill>
                   <a:srgbClr val="535E6C"/>
                 </a:solidFill>
@@ -9332,7 +10168,7 @@
               </a:defRPr>
             </a:lvl3pPr>
             <a:lvl4pPr>
-              <a:defRPr sz="1875" b="0">
+              <a:defRPr sz="1425" b="0">
                 <a:solidFill>
                   <a:srgbClr val="535E6C"/>
                 </a:solidFill>
@@ -9342,7 +10178,7 @@
               </a:defRPr>
             </a:lvl4pPr>
             <a:lvl5pPr>
-              <a:defRPr sz="1875" b="0">
+              <a:defRPr sz="1425" b="0">
                 <a:solidFill>
                   <a:srgbClr val="535E6C"/>
                 </a:solidFill>
@@ -9352,7 +10188,7 @@
               </a:defRPr>
             </a:lvl5pPr>
             <a:lvl6pPr>
-              <a:defRPr sz="1875" b="0">
+              <a:defRPr sz="1425" b="0">
                 <a:solidFill>
                   <a:srgbClr val="535E6C"/>
                 </a:solidFill>
@@ -9362,7 +10198,7 @@
               </a:defRPr>
             </a:lvl6pPr>
             <a:lvl7pPr>
-              <a:defRPr sz="1875" b="0">
+              <a:defRPr sz="1425" b="0">
                 <a:solidFill>
                   <a:srgbClr val="535E6C"/>
                 </a:solidFill>
@@ -9372,7 +10208,7 @@
               </a:defRPr>
             </a:lvl7pPr>
             <a:lvl8pPr>
-              <a:defRPr sz="1875" b="0">
+              <a:defRPr sz="1425" b="0">
                 <a:solidFill>
                   <a:srgbClr val="535E6C"/>
                 </a:solidFill>
@@ -9382,7 +10218,7 @@
               </a:defRPr>
             </a:lvl8pPr>
             <a:lvl9pPr>
-              <a:defRPr sz="1875" b="0">
+              <a:defRPr sz="1425" b="0">
                 <a:solidFill>
                   <a:srgbClr val="535E6C"/>
                 </a:solidFill>
@@ -9394,7 +10230,7 @@
           </a:lstStyle>
           <a:p xmlns:a="http://schemas.openxmlformats.org/drawingml/2006/main">
             <a:pPr>
-              <a:defRPr sz="1875" b="0">
+              <a:defRPr sz="1425" b="0">
                 <a:solidFill>
                   <a:srgbClr val="535E6C"/>
                 </a:solidFill>
@@ -9404,7 +10240,7 @@
               </a:defRPr>
             </a:pPr>
             <a:r>
-              <a:rPr sz="1875" b="0">
+              <a:rPr sz="1425" b="0">
                 <a:solidFill>
                   <a:srgbClr val="535E6C"/>
                 </a:solidFill>
@@ -9420,7 +10256,7 @@
     </p:spTree>
     <p:extLst>
       <p:ext uri="{BB962C8B-B14F-4D97-AF65-F5344CB8AC3E}">
-        <p14:creationId xmlns:p14="http://schemas.microsoft.com/office/powerpoint/2010/main" val="1362806019"/>
+        <p14:creationId xmlns:p14="http://schemas.microsoft.com/office/powerpoint/2010/main" val="109252224"/>
       </p:ext>
     </p:extLst>
   </p:cSld>
@@ -9451,7 +10287,7 @@
           <p:cNvPr id="5" name="">
             <a:extLst xmlns:a="http://schemas.openxmlformats.org/drawingml/2006/main">
               <a:ext uri="{FF2B5EF4-FFF2-40B4-BE49-F238E27FC236}">
-                <a16:creationId xmlns:a16="http://schemas.microsoft.com/office/drawing/2014/main" id="{54658636-4A92-4E7F-AD1C-182A76015B4B}"/>
+                <a16:creationId xmlns:a16="http://schemas.microsoft.com/office/drawing/2014/main" id="{1B0BC99C-65BA-4FC0-94BF-2B425BC923C0}"/>
               </a:ext>
             </a:extLst>
           </p:cNvPr>
@@ -9609,7 +10445,7 @@
           <p:cNvPr id="2" name="">
             <a:extLst xmlns:a="http://schemas.openxmlformats.org/drawingml/2006/main">
               <a:ext uri="{FF2B5EF4-FFF2-40B4-BE49-F238E27FC236}">
-                <a16:creationId xmlns:a16="http://schemas.microsoft.com/office/drawing/2014/main" id="{AB92BDBD-C94D-4634-B8DE-F813D72878A6}"/>
+                <a16:creationId xmlns:a16="http://schemas.microsoft.com/office/drawing/2014/main" id="{7A9711E1-23A3-4D37-8F34-6281FB30D999}"/>
               </a:ext>
             </a:extLst>
           </p:cNvPr>
@@ -9619,7 +10455,7 @@
           <p:nvPr/>
         </p:nvPicPr>
         <p:blipFill>
-          <a:blip xmlns:r="http://schemas.openxmlformats.org/officeDocument/2006/relationships" xmlns:a="http://schemas.openxmlformats.org/drawingml/2006/main" r:embed="Re503b73028054876"/>
+          <a:blip xmlns:r="http://schemas.openxmlformats.org/officeDocument/2006/relationships" xmlns:a="http://schemas.openxmlformats.org/drawingml/2006/main" r:embed="Re0fb23e5f13f469c"/>
           <a:stretch xmlns:a="http://schemas.openxmlformats.org/drawingml/2006/main"/>
         </p:blipFill>
         <p:spPr>
@@ -9637,7 +10473,7 @@
           <p:cNvPr id="3" name="">
             <a:extLst xmlns:a="http://schemas.openxmlformats.org/drawingml/2006/main">
               <a:ext uri="{FF2B5EF4-FFF2-40B4-BE49-F238E27FC236}">
-                <a16:creationId xmlns:a16="http://schemas.microsoft.com/office/drawing/2014/main" id="{D0D6B936-9A61-42A8-9AA9-7F84BF1E6ED5}"/>
+                <a16:creationId xmlns:a16="http://schemas.microsoft.com/office/drawing/2014/main" id="{A3DFB7DE-89FF-4C0A-88C0-87607660D4D1}"/>
               </a:ext>
             </a:extLst>
           </p:cNvPr>
@@ -9879,7 +10715,7 @@
           <p:cNvPr id="4" name="">
             <a:extLst xmlns:a="http://schemas.openxmlformats.org/drawingml/2006/main">
               <a:ext uri="{FF2B5EF4-FFF2-40B4-BE49-F238E27FC236}">
-                <a16:creationId xmlns:a16="http://schemas.microsoft.com/office/drawing/2014/main" id="{331F42E0-B024-44BC-8E98-77D527634774}"/>
+                <a16:creationId xmlns:a16="http://schemas.microsoft.com/office/drawing/2014/main" id="{513EBEA4-4CFE-4E39-B478-392B83B1C678}"/>
               </a:ext>
             </a:extLst>
           </p:cNvPr>
@@ -10035,7 +10871,7 @@
     </p:spTree>
     <p:extLst>
       <p:ext uri="{BB962C8B-B14F-4D97-AF65-F5344CB8AC3E}">
-        <p14:creationId xmlns:p14="http://schemas.microsoft.com/office/powerpoint/2010/main" val="417719004"/>
+        <p14:creationId xmlns:p14="http://schemas.microsoft.com/office/powerpoint/2010/main" val="1858900568"/>
       </p:ext>
     </p:extLst>
   </p:cSld>
@@ -10066,7 +10902,7 @@
           <p:cNvPr id="6" name="">
             <a:extLst xmlns:a="http://schemas.openxmlformats.org/drawingml/2006/main">
               <a:ext uri="{FF2B5EF4-FFF2-40B4-BE49-F238E27FC236}">
-                <a16:creationId xmlns:a16="http://schemas.microsoft.com/office/drawing/2014/main" id="{887AAD63-A54C-4C1C-8BB9-4A7EA7A8975C}"/>
+                <a16:creationId xmlns:a16="http://schemas.microsoft.com/office/drawing/2014/main" id="{3A831779-C772-4736-B2C4-F36D31CDD1B6}"/>
               </a:ext>
             </a:extLst>
           </p:cNvPr>
@@ -10224,7 +11060,7 @@
           <p:cNvPr id="2" name="">
             <a:extLst xmlns:a="http://schemas.openxmlformats.org/drawingml/2006/main">
               <a:ext uri="{FF2B5EF4-FFF2-40B4-BE49-F238E27FC236}">
-                <a16:creationId xmlns:a16="http://schemas.microsoft.com/office/drawing/2014/main" id="{CF8B94B2-33B2-4F23-BD52-ABE71994580C}"/>
+                <a16:creationId xmlns:a16="http://schemas.microsoft.com/office/drawing/2014/main" id="{4A3008C5-5036-4E56-8964-F8C43C003903}"/>
               </a:ext>
             </a:extLst>
           </p:cNvPr>
@@ -10664,7 +11500,7 @@
           <p:cNvPr id="3" name="">
             <a:extLst xmlns:a="http://schemas.openxmlformats.org/drawingml/2006/main">
               <a:ext uri="{FF2B5EF4-FFF2-40B4-BE49-F238E27FC236}">
-                <a16:creationId xmlns:a16="http://schemas.microsoft.com/office/drawing/2014/main" id="{FE40345C-3169-4747-85DD-F11A178C5A1B}"/>
+                <a16:creationId xmlns:a16="http://schemas.microsoft.com/office/drawing/2014/main" id="{351935B9-A191-49AC-ABA6-8A66A71F2E67}"/>
               </a:ext>
             </a:extLst>
           </p:cNvPr>
@@ -10868,7 +11704,7 @@
           <p:cNvPr id="4" name="">
             <a:extLst xmlns:a="http://schemas.openxmlformats.org/drawingml/2006/main">
               <a:ext uri="{FF2B5EF4-FFF2-40B4-BE49-F238E27FC236}">
-                <a16:creationId xmlns:a16="http://schemas.microsoft.com/office/drawing/2014/main" id="{392B1199-9E8F-4E7F-9530-F08DD0B43DD8}"/>
+                <a16:creationId xmlns:a16="http://schemas.microsoft.com/office/drawing/2014/main" id="{C2CD075D-AA40-4E9E-80DD-D506D6797988}"/>
               </a:ext>
             </a:extLst>
           </p:cNvPr>
@@ -11049,7 +11885,7 @@
           <p:cNvPr id="5" name="">
             <a:extLst xmlns:a="http://schemas.openxmlformats.org/drawingml/2006/main">
               <a:ext uri="{FF2B5EF4-FFF2-40B4-BE49-F238E27FC236}">
-                <a16:creationId xmlns:a16="http://schemas.microsoft.com/office/drawing/2014/main" id="{5541DD71-486C-4578-9052-132CF6BDC0B4}"/>
+                <a16:creationId xmlns:a16="http://schemas.microsoft.com/office/drawing/2014/main" id="{6463EE36-DEEA-4D6E-9E09-C88EB99584E2}"/>
               </a:ext>
             </a:extLst>
           </p:cNvPr>
@@ -11205,7 +12041,7 @@
     </p:spTree>
     <p:extLst>
       <p:ext uri="{BB962C8B-B14F-4D97-AF65-F5344CB8AC3E}">
-        <p14:creationId xmlns:p14="http://schemas.microsoft.com/office/powerpoint/2010/main" val="797911890"/>
+        <p14:creationId xmlns:p14="http://schemas.microsoft.com/office/powerpoint/2010/main" val="1338471975"/>
       </p:ext>
     </p:extLst>
   </p:cSld>
@@ -11236,7 +12072,7 @@
           <p:cNvPr id="4" name="">
             <a:extLst xmlns:a="http://schemas.openxmlformats.org/drawingml/2006/main">
               <a:ext uri="{FF2B5EF4-FFF2-40B4-BE49-F238E27FC236}">
-                <a16:creationId xmlns:a16="http://schemas.microsoft.com/office/drawing/2014/main" id="{205A2B70-F686-4131-8C9C-D0B2D371739B}"/>
+                <a16:creationId xmlns:a16="http://schemas.microsoft.com/office/drawing/2014/main" id="{14565427-793F-4F02-81C7-8F823EEDFD5E}"/>
               </a:ext>
             </a:extLst>
           </p:cNvPr>
@@ -11394,7 +12230,7 @@
           <p:cNvPr id="2" name="">
             <a:extLst xmlns:a="http://schemas.openxmlformats.org/drawingml/2006/main">
               <a:ext uri="{FF2B5EF4-FFF2-40B4-BE49-F238E27FC236}">
-                <a16:creationId xmlns:a16="http://schemas.microsoft.com/office/drawing/2014/main" id="{E58C56F9-6533-4532-B021-48FF4DE724A5}"/>
+                <a16:creationId xmlns:a16="http://schemas.microsoft.com/office/drawing/2014/main" id="{B9884A66-1BD9-483E-A60D-0EC3D1CB83D1}"/>
               </a:ext>
             </a:extLst>
           </p:cNvPr>
@@ -11598,7 +12434,7 @@
           <p:cNvPr id="3" name="">
             <a:extLst xmlns:a="http://schemas.openxmlformats.org/drawingml/2006/main">
               <a:ext uri="{FF2B5EF4-FFF2-40B4-BE49-F238E27FC236}">
-                <a16:creationId xmlns:a16="http://schemas.microsoft.com/office/drawing/2014/main" id="{35032CA8-1ED7-4FC9-89B8-623EE269FF47}"/>
+                <a16:creationId xmlns:a16="http://schemas.microsoft.com/office/drawing/2014/main" id="{6986CD8D-C3B4-42AD-9503-2AE463AD3F91}"/>
               </a:ext>
             </a:extLst>
           </p:cNvPr>
@@ -11838,7 +12674,7 @@
     </p:spTree>
     <p:extLst>
       <p:ext uri="{BB962C8B-B14F-4D97-AF65-F5344CB8AC3E}">
-        <p14:creationId xmlns:p14="http://schemas.microsoft.com/office/powerpoint/2010/main" val="574509354"/>
+        <p14:creationId xmlns:p14="http://schemas.microsoft.com/office/powerpoint/2010/main" val="1215813330"/>
       </p:ext>
     </p:extLst>
   </p:cSld>
@@ -11869,7 +12705,7 @@
           <p:cNvPr id="8" name="">
             <a:extLst xmlns:a="http://schemas.openxmlformats.org/drawingml/2006/main">
               <a:ext uri="{FF2B5EF4-FFF2-40B4-BE49-F238E27FC236}">
-                <a16:creationId xmlns:a16="http://schemas.microsoft.com/office/drawing/2014/main" id="{6B3B05E8-BAF6-4425-B50E-4C5078FA6BA9}"/>
+                <a16:creationId xmlns:a16="http://schemas.microsoft.com/office/drawing/2014/main" id="{4F056E1F-2DFE-4570-858E-52B86CFD2CC7}"/>
               </a:ext>
             </a:extLst>
           </p:cNvPr>
@@ -12027,7 +12863,7 @@
           <p:cNvPr id="2" name="">
             <a:extLst xmlns:a="http://schemas.openxmlformats.org/drawingml/2006/main">
               <a:ext uri="{FF2B5EF4-FFF2-40B4-BE49-F238E27FC236}">
-                <a16:creationId xmlns:a16="http://schemas.microsoft.com/office/drawing/2014/main" id="{133DC4C5-3723-4693-AD73-0E1B9224BFC8}"/>
+                <a16:creationId xmlns:a16="http://schemas.microsoft.com/office/drawing/2014/main" id="{71AC908C-8278-4171-BF58-F4E0FB44FF6B}"/>
               </a:ext>
             </a:extLst>
           </p:cNvPr>
@@ -12185,7 +13021,7 @@
           <p:cNvPr id="3" name="">
             <a:extLst xmlns:a="http://schemas.openxmlformats.org/drawingml/2006/main">
               <a:ext uri="{FF2B5EF4-FFF2-40B4-BE49-F238E27FC236}">
-                <a16:creationId xmlns:a16="http://schemas.microsoft.com/office/drawing/2014/main" id="{2214A614-F888-414B-9A6F-11E0D62AC615}"/>
+                <a16:creationId xmlns:a16="http://schemas.microsoft.com/office/drawing/2014/main" id="{A9C33E09-FD9B-445A-8B91-7600EB36DE57}"/>
               </a:ext>
             </a:extLst>
           </p:cNvPr>
@@ -12343,7 +13179,7 @@
           <p:cNvPr id="4" name="">
             <a:extLst xmlns:a="http://schemas.openxmlformats.org/drawingml/2006/main">
               <a:ext uri="{FF2B5EF4-FFF2-40B4-BE49-F238E27FC236}">
-                <a16:creationId xmlns:a16="http://schemas.microsoft.com/office/drawing/2014/main" id="{0E6CBC0C-4653-4480-A326-DE89E324BCB2}"/>
+                <a16:creationId xmlns:a16="http://schemas.microsoft.com/office/drawing/2014/main" id="{1BAB272D-4BE9-4518-8963-044F0DE1D721}"/>
               </a:ext>
             </a:extLst>
           </p:cNvPr>
@@ -12501,7 +13337,7 @@
           <p:cNvPr id="5" name="">
             <a:extLst xmlns:a="http://schemas.openxmlformats.org/drawingml/2006/main">
               <a:ext uri="{FF2B5EF4-FFF2-40B4-BE49-F238E27FC236}">
-                <a16:creationId xmlns:a16="http://schemas.microsoft.com/office/drawing/2014/main" id="{52361737-C0B4-4B3E-B2B5-8B2A52CB3F90}"/>
+                <a16:creationId xmlns:a16="http://schemas.microsoft.com/office/drawing/2014/main" id="{191F25E8-E526-43E9-B150-D949D87005CA}"/>
               </a:ext>
             </a:extLst>
           </p:cNvPr>
@@ -12938,7 +13774,7 @@
           <p:cNvPr id="6" name="">
             <a:extLst xmlns:a="http://schemas.openxmlformats.org/drawingml/2006/main">
               <a:ext uri="{FF2B5EF4-FFF2-40B4-BE49-F238E27FC236}">
-                <a16:creationId xmlns:a16="http://schemas.microsoft.com/office/drawing/2014/main" id="{EA8ECDB0-A346-4522-AB9E-16620057F84C}"/>
+                <a16:creationId xmlns:a16="http://schemas.microsoft.com/office/drawing/2014/main" id="{FD987B46-E6AE-4AB3-B77B-D6D591B78EB3}"/>
               </a:ext>
             </a:extLst>
           </p:cNvPr>
@@ -13096,7 +13932,7 @@
           <p:cNvPr id="7" name="">
             <a:extLst xmlns:a="http://schemas.openxmlformats.org/drawingml/2006/main">
               <a:ext uri="{FF2B5EF4-FFF2-40B4-BE49-F238E27FC236}">
-                <a16:creationId xmlns:a16="http://schemas.microsoft.com/office/drawing/2014/main" id="{A36A6A78-4832-4F27-AFB0-D0FCEB8055C2}"/>
+                <a16:creationId xmlns:a16="http://schemas.microsoft.com/office/drawing/2014/main" id="{98E1595D-DFC1-4358-8511-9C3C45BFB168}"/>
               </a:ext>
             </a:extLst>
           </p:cNvPr>
@@ -13252,7 +14088,7 @@
     </p:spTree>
     <p:extLst>
       <p:ext uri="{BB962C8B-B14F-4D97-AF65-F5344CB8AC3E}">
-        <p14:creationId xmlns:p14="http://schemas.microsoft.com/office/powerpoint/2010/main" val="75360529"/>
+        <p14:creationId xmlns:p14="http://schemas.microsoft.com/office/powerpoint/2010/main" val="316241771"/>
       </p:ext>
     </p:extLst>
   </p:cSld>
@@ -13283,7 +14119,7 @@
           <p:cNvPr id="7" name="">
             <a:extLst xmlns:a="http://schemas.openxmlformats.org/drawingml/2006/main">
               <a:ext uri="{FF2B5EF4-FFF2-40B4-BE49-F238E27FC236}">
-                <a16:creationId xmlns:a16="http://schemas.microsoft.com/office/drawing/2014/main" id="{6AF45D11-1B29-407A-BDD1-350CF0D1573B}"/>
+                <a16:creationId xmlns:a16="http://schemas.microsoft.com/office/drawing/2014/main" id="{85A1DD68-9B09-408B-80FD-F60C861BB4EA}"/>
               </a:ext>
             </a:extLst>
           </p:cNvPr>
@@ -13441,7 +14277,7 @@
           <p:cNvPr id="2" name="">
             <a:extLst xmlns:a="http://schemas.openxmlformats.org/drawingml/2006/main">
               <a:ext uri="{FF2B5EF4-FFF2-40B4-BE49-F238E27FC236}">
-                <a16:creationId xmlns:a16="http://schemas.microsoft.com/office/drawing/2014/main" id="{0DDFD808-1625-46C8-AFE4-C015DF3C0DC3}"/>
+                <a16:creationId xmlns:a16="http://schemas.microsoft.com/office/drawing/2014/main" id="{F478DB91-93B5-49D4-9B7E-6B012D41C202}"/>
               </a:ext>
             </a:extLst>
           </p:cNvPr>
@@ -13599,7 +14435,7 @@
           <p:cNvPr id="3" name="">
             <a:extLst xmlns:a="http://schemas.openxmlformats.org/drawingml/2006/main">
               <a:ext uri="{FF2B5EF4-FFF2-40B4-BE49-F238E27FC236}">
-                <a16:creationId xmlns:a16="http://schemas.microsoft.com/office/drawing/2014/main" id="{B794118C-5F42-41EA-94FD-4C03339DF22F}"/>
+                <a16:creationId xmlns:a16="http://schemas.microsoft.com/office/drawing/2014/main" id="{F48244A1-C57F-47C6-AEA7-45703FDB4800}"/>
               </a:ext>
             </a:extLst>
           </p:cNvPr>
@@ -14110,7 +14946,7 @@
           <p:cNvPr id="4" name="">
             <a:extLst xmlns:a="http://schemas.openxmlformats.org/drawingml/2006/main">
               <a:ext uri="{FF2B5EF4-FFF2-40B4-BE49-F238E27FC236}">
-                <a16:creationId xmlns:a16="http://schemas.microsoft.com/office/drawing/2014/main" id="{5435C693-B9EC-4BC4-A137-B3A3D2DAD2D3}"/>
+                <a16:creationId xmlns:a16="http://schemas.microsoft.com/office/drawing/2014/main" id="{44154765-C992-4111-B68E-B17E76B0BC09}"/>
               </a:ext>
             </a:extLst>
           </p:cNvPr>
@@ -14291,7 +15127,7 @@
           <p:cNvPr id="5" name="">
             <a:extLst xmlns:a="http://schemas.openxmlformats.org/drawingml/2006/main">
               <a:ext uri="{FF2B5EF4-FFF2-40B4-BE49-F238E27FC236}">
-                <a16:creationId xmlns:a16="http://schemas.microsoft.com/office/drawing/2014/main" id="{19179F7D-1AD0-4ED5-84A9-4475427EB66D}"/>
+                <a16:creationId xmlns:a16="http://schemas.microsoft.com/office/drawing/2014/main" id="{8A456612-B95A-4A69-8B34-5BA86F6D2D01}"/>
               </a:ext>
             </a:extLst>
           </p:cNvPr>
@@ -14472,7 +15308,7 @@
           <p:cNvPr id="6" name="">
             <a:extLst xmlns:a="http://schemas.openxmlformats.org/drawingml/2006/main">
               <a:ext uri="{FF2B5EF4-FFF2-40B4-BE49-F238E27FC236}">
-                <a16:creationId xmlns:a16="http://schemas.microsoft.com/office/drawing/2014/main" id="{0687AD1A-A952-490F-8AF5-4FB91DE9E889}"/>
+                <a16:creationId xmlns:a16="http://schemas.microsoft.com/office/drawing/2014/main" id="{1E72338B-9F57-4B19-BB64-28BDE00060BF}"/>
               </a:ext>
             </a:extLst>
           </p:cNvPr>
@@ -14628,7 +15464,7 @@
     </p:spTree>
     <p:extLst>
       <p:ext uri="{BB962C8B-B14F-4D97-AF65-F5344CB8AC3E}">
-        <p14:creationId xmlns:p14="http://schemas.microsoft.com/office/powerpoint/2010/main" val="1738968420"/>
+        <p14:creationId xmlns:p14="http://schemas.microsoft.com/office/powerpoint/2010/main" val="1642216426"/>
       </p:ext>
     </p:extLst>
   </p:cSld>
@@ -14659,7 +15495,7 @@
           <p:cNvPr id="7" name="">
             <a:extLst xmlns:a="http://schemas.openxmlformats.org/drawingml/2006/main">
               <a:ext uri="{FF2B5EF4-FFF2-40B4-BE49-F238E27FC236}">
-                <a16:creationId xmlns:a16="http://schemas.microsoft.com/office/drawing/2014/main" id="{EE557D60-285B-4F64-8D77-627D2D7D4CF2}"/>
+                <a16:creationId xmlns:a16="http://schemas.microsoft.com/office/drawing/2014/main" id="{DD8663B0-668C-4D45-99E4-F2F98EBC6846}"/>
               </a:ext>
             </a:extLst>
           </p:cNvPr>
@@ -14817,7 +15653,7 @@
           <p:cNvPr id="2" name="">
             <a:extLst xmlns:a="http://schemas.openxmlformats.org/drawingml/2006/main">
               <a:ext uri="{FF2B5EF4-FFF2-40B4-BE49-F238E27FC236}">
-                <a16:creationId xmlns:a16="http://schemas.microsoft.com/office/drawing/2014/main" id="{43E1EF36-6B28-448C-93C9-E87C69FC051E}"/>
+                <a16:creationId xmlns:a16="http://schemas.microsoft.com/office/drawing/2014/main" id="{FA4E2671-66A5-4BE5-8507-C2A12AB8257C}"/>
               </a:ext>
             </a:extLst>
           </p:cNvPr>
@@ -14975,7 +15811,7 @@
           <p:cNvPr id="3" name="">
             <a:extLst xmlns:a="http://schemas.openxmlformats.org/drawingml/2006/main">
               <a:ext uri="{FF2B5EF4-FFF2-40B4-BE49-F238E27FC236}">
-                <a16:creationId xmlns:a16="http://schemas.microsoft.com/office/drawing/2014/main" id="{4250D294-067E-4D37-B7DE-1988CA15CACC}"/>
+                <a16:creationId xmlns:a16="http://schemas.microsoft.com/office/drawing/2014/main" id="{B8756AD9-212A-463B-AC4E-295D8060BFE4}"/>
               </a:ext>
             </a:extLst>
           </p:cNvPr>
@@ -15485,7 +16321,7 @@
           <p:cNvPr id="4" name="">
             <a:extLst xmlns:a="http://schemas.openxmlformats.org/drawingml/2006/main">
               <a:ext uri="{FF2B5EF4-FFF2-40B4-BE49-F238E27FC236}">
-                <a16:creationId xmlns:a16="http://schemas.microsoft.com/office/drawing/2014/main" id="{61834FD4-99EF-49DC-9C24-3BB22C5A0966}"/>
+                <a16:creationId xmlns:a16="http://schemas.microsoft.com/office/drawing/2014/main" id="{5EA1007A-3B86-49BD-9D72-BAA2CDCCA3D5}"/>
               </a:ext>
             </a:extLst>
           </p:cNvPr>
@@ -15643,7 +16479,7 @@
           <p:cNvPr id="5" name="">
             <a:extLst xmlns:a="http://schemas.openxmlformats.org/drawingml/2006/main">
               <a:ext uri="{FF2B5EF4-FFF2-40B4-BE49-F238E27FC236}">
-                <a16:creationId xmlns:a16="http://schemas.microsoft.com/office/drawing/2014/main" id="{8512764C-06AD-46C3-A8B0-DC221E4E1523}"/>
+                <a16:creationId xmlns:a16="http://schemas.microsoft.com/office/drawing/2014/main" id="{5F6F6EBA-AA5B-490C-B3A1-33323A868B9A}"/>
               </a:ext>
             </a:extLst>
           </p:cNvPr>
@@ -15801,7 +16637,7 @@
           <p:cNvPr id="6" name="">
             <a:extLst xmlns:a="http://schemas.openxmlformats.org/drawingml/2006/main">
               <a:ext uri="{FF2B5EF4-FFF2-40B4-BE49-F238E27FC236}">
-                <a16:creationId xmlns:a16="http://schemas.microsoft.com/office/drawing/2014/main" id="{494392D3-9028-49B5-973B-657A9399F6F3}"/>
+                <a16:creationId xmlns:a16="http://schemas.microsoft.com/office/drawing/2014/main" id="{D2025919-7767-4BE2-9BA5-49FD74D6BC55}"/>
               </a:ext>
             </a:extLst>
           </p:cNvPr>
@@ -15957,7 +16793,7 @@
     </p:spTree>
     <p:extLst>
       <p:ext uri="{BB962C8B-B14F-4D97-AF65-F5344CB8AC3E}">
-        <p14:creationId xmlns:p14="http://schemas.microsoft.com/office/powerpoint/2010/main" val="87796941"/>
+        <p14:creationId xmlns:p14="http://schemas.microsoft.com/office/powerpoint/2010/main" val="628395692"/>
       </p:ext>
     </p:extLst>
   </p:cSld>
@@ -15988,7 +16824,7 @@
           <p:cNvPr id="7" name="">
             <a:extLst xmlns:a="http://schemas.openxmlformats.org/drawingml/2006/main">
               <a:ext uri="{FF2B5EF4-FFF2-40B4-BE49-F238E27FC236}">
-                <a16:creationId xmlns:a16="http://schemas.microsoft.com/office/drawing/2014/main" id="{87C296D1-D8A8-44F2-8823-C0508906F270}"/>
+                <a16:creationId xmlns:a16="http://schemas.microsoft.com/office/drawing/2014/main" id="{B30DD006-6457-4306-9468-99447D4B5C65}"/>
               </a:ext>
             </a:extLst>
           </p:cNvPr>
@@ -16146,7 +16982,7 @@
           <p:cNvPr id="2" name="">
             <a:extLst xmlns:a="http://schemas.openxmlformats.org/drawingml/2006/main">
               <a:ext uri="{FF2B5EF4-FFF2-40B4-BE49-F238E27FC236}">
-                <a16:creationId xmlns:a16="http://schemas.microsoft.com/office/drawing/2014/main" id="{70EB1D3A-E0EB-4B9A-A562-58F618975D0E}"/>
+                <a16:creationId xmlns:a16="http://schemas.microsoft.com/office/drawing/2014/main" id="{D4E8E632-EF2B-45E2-B076-1510A4389E20}"/>
               </a:ext>
             </a:extLst>
           </p:cNvPr>
@@ -16304,7 +17140,7 @@
           <p:cNvPr id="3" name="">
             <a:extLst xmlns:a="http://schemas.openxmlformats.org/drawingml/2006/main">
               <a:ext uri="{FF2B5EF4-FFF2-40B4-BE49-F238E27FC236}">
-                <a16:creationId xmlns:a16="http://schemas.microsoft.com/office/drawing/2014/main" id="{0E3E7326-25BF-4F86-B7F6-D41711F400C7}"/>
+                <a16:creationId xmlns:a16="http://schemas.microsoft.com/office/drawing/2014/main" id="{47EBC674-CFAD-4760-B72D-ED2F7C64FC2A}"/>
               </a:ext>
             </a:extLst>
           </p:cNvPr>
@@ -16462,7 +17298,7 @@
           <p:cNvPr id="4" name="">
             <a:extLst xmlns:a="http://schemas.openxmlformats.org/drawingml/2006/main">
               <a:ext uri="{FF2B5EF4-FFF2-40B4-BE49-F238E27FC236}">
-                <a16:creationId xmlns:a16="http://schemas.microsoft.com/office/drawing/2014/main" id="{4307CB25-A589-44EF-B80F-157F7059264C}"/>
+                <a16:creationId xmlns:a16="http://schemas.microsoft.com/office/drawing/2014/main" id="{CCC25E9D-B5D5-4913-8801-567E91AE9465}"/>
               </a:ext>
             </a:extLst>
           </p:cNvPr>
@@ -16620,7 +17456,7 @@
           <p:cNvPr id="5" name="">
             <a:extLst xmlns:a="http://schemas.openxmlformats.org/drawingml/2006/main">
               <a:ext uri="{FF2B5EF4-FFF2-40B4-BE49-F238E27FC236}">
-                <a16:creationId xmlns:a16="http://schemas.microsoft.com/office/drawing/2014/main" id="{898B28AB-10EE-4173-BBBF-6B2745CFA0BE}"/>
+                <a16:creationId xmlns:a16="http://schemas.microsoft.com/office/drawing/2014/main" id="{BF39CF95-D2CE-4389-BB53-FC92FAFCA2B0}"/>
               </a:ext>
             </a:extLst>
           </p:cNvPr>
@@ -16778,7 +17614,7 @@
           <p:cNvPr id="6" name="">
             <a:extLst xmlns:a="http://schemas.openxmlformats.org/drawingml/2006/main">
               <a:ext uri="{FF2B5EF4-FFF2-40B4-BE49-F238E27FC236}">
-                <a16:creationId xmlns:a16="http://schemas.microsoft.com/office/drawing/2014/main" id="{38C1AD7B-BB34-4C8B-BE59-02DA5F7D51E7}"/>
+                <a16:creationId xmlns:a16="http://schemas.microsoft.com/office/drawing/2014/main" id="{8DA76C71-D006-468E-8397-DB7D566BDEA2}"/>
               </a:ext>
             </a:extLst>
           </p:cNvPr>
@@ -17056,7 +17892,7 @@
     </p:spTree>
     <p:extLst>
       <p:ext uri="{BB962C8B-B14F-4D97-AF65-F5344CB8AC3E}">
-        <p14:creationId xmlns:p14="http://schemas.microsoft.com/office/powerpoint/2010/main" val="1787448847"/>
+        <p14:creationId xmlns:p14="http://schemas.microsoft.com/office/powerpoint/2010/main" val="1408005166"/>
       </p:ext>
     </p:extLst>
   </p:cSld>
@@ -17087,7 +17923,7 @@
           <p:cNvPr id="5" name="">
             <a:extLst xmlns:a="http://schemas.openxmlformats.org/drawingml/2006/main">
               <a:ext uri="{FF2B5EF4-FFF2-40B4-BE49-F238E27FC236}">
-                <a16:creationId xmlns:a16="http://schemas.microsoft.com/office/drawing/2014/main" id="{36D73C2D-3675-4184-B807-DBDDC406DD77}"/>
+                <a16:creationId xmlns:a16="http://schemas.microsoft.com/office/drawing/2014/main" id="{928B0C9B-7FE4-4F9D-B345-ED2BE0A94C29}"/>
               </a:ext>
             </a:extLst>
           </p:cNvPr>
@@ -17245,7 +18081,7 @@
           <p:cNvPr id="2" name="">
             <a:extLst xmlns:a="http://schemas.openxmlformats.org/drawingml/2006/main">
               <a:ext uri="{FF2B5EF4-FFF2-40B4-BE49-F238E27FC236}">
-                <a16:creationId xmlns:a16="http://schemas.microsoft.com/office/drawing/2014/main" id="{448C324A-CF1D-4A6A-B6F9-3FF52EA80DC1}"/>
+                <a16:creationId xmlns:a16="http://schemas.microsoft.com/office/drawing/2014/main" id="{BFD1405F-5450-4BC3-A1BF-D9A2D5308FFF}"/>
               </a:ext>
             </a:extLst>
           </p:cNvPr>
@@ -17403,7 +18239,7 @@
           <p:cNvPr id="3" name="Chart">
             <a:extLst xmlns:a="http://schemas.openxmlformats.org/drawingml/2006/main">
               <a:ext uri="{FF2B5EF4-FFF2-40B4-BE49-F238E27FC236}">
-                <a16:creationId xmlns:a16="http://schemas.microsoft.com/office/drawing/2014/main" id="{FBDDC081-E3D6-4806-A1FD-4322D586C32B}"/>
+                <a16:creationId xmlns:a16="http://schemas.microsoft.com/office/drawing/2014/main" id="{DB5BB0BC-ABCC-4C2F-AA38-375929E75500}"/>
               </a:ext>
             </a:extLst>
           </p:cNvPr>
@@ -17416,7 +18252,7 @@
         </p:xfrm>
         <a:graphic xmlns:a="http://schemas.openxmlformats.org/drawingml/2006/main">
           <a:graphicData uri="http://schemas.openxmlformats.org/drawingml/2006/chart">
-            <c:chart xmlns:r="http://schemas.openxmlformats.org/officeDocument/2006/relationships" xmlns:c="http://schemas.openxmlformats.org/drawingml/2006/chart" r:id="R164359c1834e41c7"/>
+            <c:chart xmlns:r="http://schemas.openxmlformats.org/officeDocument/2006/relationships" xmlns:c="http://schemas.openxmlformats.org/drawingml/2006/chart" r:id="Rb246c9c1b5364b33"/>
           </a:graphicData>
         </a:graphic>
       </p:graphicFrame>
@@ -17425,7 +18261,7 @@
           <p:cNvPr id="4" name="">
             <a:extLst xmlns:a="http://schemas.openxmlformats.org/drawingml/2006/main">
               <a:ext uri="{FF2B5EF4-FFF2-40B4-BE49-F238E27FC236}">
-                <a16:creationId xmlns:a16="http://schemas.microsoft.com/office/drawing/2014/main" id="{F179156A-28E2-4370-B880-893B26D50E72}"/>
+                <a16:creationId xmlns:a16="http://schemas.microsoft.com/office/drawing/2014/main" id="{B0594E60-2B2E-4E8F-8922-CDCCCEA1A10F}"/>
               </a:ext>
             </a:extLst>
           </p:cNvPr>
@@ -17581,7 +18417,7 @@
     </p:spTree>
     <p:extLst>
       <p:ext uri="{BB962C8B-B14F-4D97-AF65-F5344CB8AC3E}">
-        <p14:creationId xmlns:p14="http://schemas.microsoft.com/office/powerpoint/2010/main" val="686832782"/>
+        <p14:creationId xmlns:p14="http://schemas.microsoft.com/office/powerpoint/2010/main" val="1180434784"/>
       </p:ext>
     </p:extLst>
   </p:cSld>
@@ -17612,7 +18448,7 @@
           <p:cNvPr id="6" name="">
             <a:extLst xmlns:a="http://schemas.openxmlformats.org/drawingml/2006/main">
               <a:ext uri="{FF2B5EF4-FFF2-40B4-BE49-F238E27FC236}">
-                <a16:creationId xmlns:a16="http://schemas.microsoft.com/office/drawing/2014/main" id="{BDC36536-04FC-4943-9DCC-BA7AB8D63218}"/>
+                <a16:creationId xmlns:a16="http://schemas.microsoft.com/office/drawing/2014/main" id="{BB5B6D55-39F4-43D3-84E3-9350C9BD6126}"/>
               </a:ext>
             </a:extLst>
           </p:cNvPr>
@@ -17770,7 +18606,7 @@
           <p:cNvPr id="2" name="">
             <a:extLst xmlns:a="http://schemas.openxmlformats.org/drawingml/2006/main">
               <a:ext uri="{FF2B5EF4-FFF2-40B4-BE49-F238E27FC236}">
-                <a16:creationId xmlns:a16="http://schemas.microsoft.com/office/drawing/2014/main" id="{58E610B7-9D2D-4B4C-835F-42D0B04ECF7B}"/>
+                <a16:creationId xmlns:a16="http://schemas.microsoft.com/office/drawing/2014/main" id="{8E80C3BD-9DF6-42D1-8F82-6CE3FE07CFA5}"/>
               </a:ext>
             </a:extLst>
           </p:cNvPr>
@@ -17928,7 +18764,7 @@
           <p:cNvPr id="3" name="">
             <a:extLst xmlns:a="http://schemas.openxmlformats.org/drawingml/2006/main">
               <a:ext uri="{FF2B5EF4-FFF2-40B4-BE49-F238E27FC236}">
-                <a16:creationId xmlns:a16="http://schemas.microsoft.com/office/drawing/2014/main" id="{85577BB0-20B9-4D38-8FD7-647F6A698ACB}"/>
+                <a16:creationId xmlns:a16="http://schemas.microsoft.com/office/drawing/2014/main" id="{D41A4B54-03C0-4308-A81B-8624EFDAC5C5}"/>
               </a:ext>
             </a:extLst>
           </p:cNvPr>
@@ -18671,7 +19507,7 @@
           <p:cNvPr id="4" name="">
             <a:extLst xmlns:a="http://schemas.openxmlformats.org/drawingml/2006/main">
               <a:ext uri="{FF2B5EF4-FFF2-40B4-BE49-F238E27FC236}">
-                <a16:creationId xmlns:a16="http://schemas.microsoft.com/office/drawing/2014/main" id="{96F8A8BA-F065-48F4-A5E5-C710ACD053E8}"/>
+                <a16:creationId xmlns:a16="http://schemas.microsoft.com/office/drawing/2014/main" id="{A81ECFFE-C4DB-45FD-A50C-0E9FF2F77E55}"/>
               </a:ext>
             </a:extLst>
           </p:cNvPr>
@@ -18829,7 +19665,7 @@
           <p:cNvPr id="5" name="">
             <a:extLst xmlns:a="http://schemas.openxmlformats.org/drawingml/2006/main">
               <a:ext uri="{FF2B5EF4-FFF2-40B4-BE49-F238E27FC236}">
-                <a16:creationId xmlns:a16="http://schemas.microsoft.com/office/drawing/2014/main" id="{2A503E48-5901-4BF4-AD9E-241425971669}"/>
+                <a16:creationId xmlns:a16="http://schemas.microsoft.com/office/drawing/2014/main" id="{8F3B5688-704E-4A82-8A49-20B8FCBBFEAE}"/>
               </a:ext>
             </a:extLst>
           </p:cNvPr>
@@ -18985,7 +19821,7 @@
     </p:spTree>
     <p:extLst>
       <p:ext uri="{BB962C8B-B14F-4D97-AF65-F5344CB8AC3E}">
-        <p14:creationId xmlns:p14="http://schemas.microsoft.com/office/powerpoint/2010/main" val="1514121519"/>
+        <p14:creationId xmlns:p14="http://schemas.microsoft.com/office/powerpoint/2010/main" val="1382555023"/>
       </p:ext>
     </p:extLst>
   </p:cSld>
@@ -19016,7 +19852,7 @@
           <p:cNvPr id="7" name="">
             <a:extLst xmlns:a="http://schemas.openxmlformats.org/drawingml/2006/main">
               <a:ext uri="{FF2B5EF4-FFF2-40B4-BE49-F238E27FC236}">
-                <a16:creationId xmlns:a16="http://schemas.microsoft.com/office/drawing/2014/main" id="{357F59CC-4D7D-4C32-AE14-6319BD346CC6}"/>
+                <a16:creationId xmlns:a16="http://schemas.microsoft.com/office/drawing/2014/main" id="{7B3F390F-49BC-4329-8B8D-3CA5B5B8C406}"/>
               </a:ext>
             </a:extLst>
           </p:cNvPr>
@@ -19174,7 +20010,7 @@
           <p:cNvPr id="2" name="">
             <a:extLst xmlns:a="http://schemas.openxmlformats.org/drawingml/2006/main">
               <a:ext uri="{FF2B5EF4-FFF2-40B4-BE49-F238E27FC236}">
-                <a16:creationId xmlns:a16="http://schemas.microsoft.com/office/drawing/2014/main" id="{0FA04596-42F7-47BB-9D3B-3B6640357DF9}"/>
+                <a16:creationId xmlns:a16="http://schemas.microsoft.com/office/drawing/2014/main" id="{99A8D025-1803-478C-A534-F68FAE9C485F}"/>
               </a:ext>
             </a:extLst>
           </p:cNvPr>
@@ -19332,7 +20168,7 @@
           <p:cNvPr id="3" name="Chart">
             <a:extLst xmlns:a="http://schemas.openxmlformats.org/drawingml/2006/main">
               <a:ext uri="{FF2B5EF4-FFF2-40B4-BE49-F238E27FC236}">
-                <a16:creationId xmlns:a16="http://schemas.microsoft.com/office/drawing/2014/main" id="{C80CC8E1-49E5-4D22-B788-F91F3504CD0E}"/>
+                <a16:creationId xmlns:a16="http://schemas.microsoft.com/office/drawing/2014/main" id="{B3D91A26-6437-4D3B-922B-B659D3C0BE9C}"/>
               </a:ext>
             </a:extLst>
           </p:cNvPr>
@@ -19345,7 +20181,7 @@
         </p:xfrm>
         <a:graphic xmlns:a="http://schemas.openxmlformats.org/drawingml/2006/main">
           <a:graphicData uri="http://schemas.openxmlformats.org/drawingml/2006/chart">
-            <c:chart xmlns:r="http://schemas.openxmlformats.org/officeDocument/2006/relationships" xmlns:c="http://schemas.openxmlformats.org/drawingml/2006/chart" r:id="Rf19de7275f0e4232"/>
+            <c:chart xmlns:r="http://schemas.openxmlformats.org/officeDocument/2006/relationships" xmlns:c="http://schemas.openxmlformats.org/drawingml/2006/chart" r:id="R015b00ee62fa4b5a"/>
           </a:graphicData>
         </a:graphic>
       </p:graphicFrame>
@@ -19354,7 +20190,7 @@
           <p:cNvPr id="4" name="Chart">
             <a:extLst xmlns:a="http://schemas.openxmlformats.org/drawingml/2006/main">
               <a:ext uri="{FF2B5EF4-FFF2-40B4-BE49-F238E27FC236}">
-                <a16:creationId xmlns:a16="http://schemas.microsoft.com/office/drawing/2014/main" id="{5499293C-5C1E-4B5F-9A48-8E6B65999064}"/>
+                <a16:creationId xmlns:a16="http://schemas.microsoft.com/office/drawing/2014/main" id="{3494118F-AD9F-40A0-80DA-F1345B3B4398}"/>
               </a:ext>
             </a:extLst>
           </p:cNvPr>
@@ -19367,7 +20203,7 @@
         </p:xfrm>
         <a:graphic xmlns:a="http://schemas.openxmlformats.org/drawingml/2006/main">
           <a:graphicData uri="http://schemas.openxmlformats.org/drawingml/2006/chart">
-            <c:chart xmlns:r="http://schemas.openxmlformats.org/officeDocument/2006/relationships" xmlns:c="http://schemas.openxmlformats.org/drawingml/2006/chart" r:id="R8c75888caf7f49f2"/>
+            <c:chart xmlns:r="http://schemas.openxmlformats.org/officeDocument/2006/relationships" xmlns:c="http://schemas.openxmlformats.org/drawingml/2006/chart" r:id="R67a890b8e2244c10"/>
           </a:graphicData>
         </a:graphic>
       </p:graphicFrame>
@@ -19376,7 +20212,7 @@
           <p:cNvPr id="5" name="">
             <a:extLst xmlns:a="http://schemas.openxmlformats.org/drawingml/2006/main">
               <a:ext uri="{FF2B5EF4-FFF2-40B4-BE49-F238E27FC236}">
-                <a16:creationId xmlns:a16="http://schemas.microsoft.com/office/drawing/2014/main" id="{C0429FEA-D447-496F-8183-2D9E4D88E15B}"/>
+                <a16:creationId xmlns:a16="http://schemas.microsoft.com/office/drawing/2014/main" id="{6B16626F-13F7-4BD2-8A46-7B23A2D3EF76}"/>
               </a:ext>
             </a:extLst>
           </p:cNvPr>
@@ -19557,7 +20393,7 @@
           <p:cNvPr id="6" name="">
             <a:extLst xmlns:a="http://schemas.openxmlformats.org/drawingml/2006/main">
               <a:ext uri="{FF2B5EF4-FFF2-40B4-BE49-F238E27FC236}">
-                <a16:creationId xmlns:a16="http://schemas.microsoft.com/office/drawing/2014/main" id="{D3AB4937-7919-4C0E-BEA5-581190595A45}"/>
+                <a16:creationId xmlns:a16="http://schemas.microsoft.com/office/drawing/2014/main" id="{E82E1DC5-1F1D-4F8C-8A29-99AB7ED42C7C}"/>
               </a:ext>
             </a:extLst>
           </p:cNvPr>
@@ -19736,7 +20572,7 @@
     </p:spTree>
     <p:extLst>
       <p:ext uri="{BB962C8B-B14F-4D97-AF65-F5344CB8AC3E}">
-        <p14:creationId xmlns:p14="http://schemas.microsoft.com/office/powerpoint/2010/main" val="1750161716"/>
+        <p14:creationId xmlns:p14="http://schemas.microsoft.com/office/powerpoint/2010/main" val="1888702408"/>
       </p:ext>
     </p:extLst>
   </p:cSld>
@@ -19767,7 +20603,7 @@
           <p:cNvPr id="6" name="">
             <a:extLst xmlns:a="http://schemas.openxmlformats.org/drawingml/2006/main">
               <a:ext uri="{FF2B5EF4-FFF2-40B4-BE49-F238E27FC236}">
-                <a16:creationId xmlns:a16="http://schemas.microsoft.com/office/drawing/2014/main" id="{0C22EE67-F788-4531-ACDA-E5B64F9FFF1D}"/>
+                <a16:creationId xmlns:a16="http://schemas.microsoft.com/office/drawing/2014/main" id="{5E40F06C-CD08-4786-944B-09684C5B8965}"/>
               </a:ext>
             </a:extLst>
           </p:cNvPr>
@@ -19925,7 +20761,7 @@
           <p:cNvPr id="2" name="Chart">
             <a:extLst xmlns:a="http://schemas.openxmlformats.org/drawingml/2006/main">
               <a:ext uri="{FF2B5EF4-FFF2-40B4-BE49-F238E27FC236}">
-                <a16:creationId xmlns:a16="http://schemas.microsoft.com/office/drawing/2014/main" id="{A27A5A96-F53E-4022-A68E-3908C3826F34}"/>
+                <a16:creationId xmlns:a16="http://schemas.microsoft.com/office/drawing/2014/main" id="{55D5A632-6ECB-4E95-A3BF-57F7681002B4}"/>
               </a:ext>
             </a:extLst>
           </p:cNvPr>
@@ -19938,7 +20774,7 @@
         </p:xfrm>
         <a:graphic xmlns:a="http://schemas.openxmlformats.org/drawingml/2006/main">
           <a:graphicData uri="http://schemas.openxmlformats.org/drawingml/2006/chart">
-            <c:chart xmlns:r="http://schemas.openxmlformats.org/officeDocument/2006/relationships" xmlns:c="http://schemas.openxmlformats.org/drawingml/2006/chart" r:id="Rdbd21034dcd94b3f"/>
+            <c:chart xmlns:r="http://schemas.openxmlformats.org/officeDocument/2006/relationships" xmlns:c="http://schemas.openxmlformats.org/drawingml/2006/chart" r:id="R634ec96fba1b44f5"/>
           </a:graphicData>
         </a:graphic>
       </p:graphicFrame>
@@ -19947,7 +20783,7 @@
           <p:cNvPr id="3" name="">
             <a:extLst xmlns:a="http://schemas.openxmlformats.org/drawingml/2006/main">
               <a:ext uri="{FF2B5EF4-FFF2-40B4-BE49-F238E27FC236}">
-                <a16:creationId xmlns:a16="http://schemas.microsoft.com/office/drawing/2014/main" id="{DF7E2CF5-24B8-4AA2-B695-B268F278C185}"/>
+                <a16:creationId xmlns:a16="http://schemas.microsoft.com/office/drawing/2014/main" id="{117D975A-4E06-42B5-A256-C89399BE5809}"/>
               </a:ext>
             </a:extLst>
           </p:cNvPr>
@@ -20174,7 +21010,7 @@
           <p:cNvPr id="4" name="">
             <a:extLst xmlns:a="http://schemas.openxmlformats.org/drawingml/2006/main">
               <a:ext uri="{FF2B5EF4-FFF2-40B4-BE49-F238E27FC236}">
-                <a16:creationId xmlns:a16="http://schemas.microsoft.com/office/drawing/2014/main" id="{6E97FC31-7479-4437-80EB-CE18F4696203}"/>
+                <a16:creationId xmlns:a16="http://schemas.microsoft.com/office/drawing/2014/main" id="{AA189790-904B-43AB-8E07-E4C9D95F625D}"/>
               </a:ext>
             </a:extLst>
           </p:cNvPr>
@@ -20378,7 +21214,7 @@
           <p:cNvPr id="5" name="">
             <a:extLst xmlns:a="http://schemas.openxmlformats.org/drawingml/2006/main">
               <a:ext uri="{FF2B5EF4-FFF2-40B4-BE49-F238E27FC236}">
-                <a16:creationId xmlns:a16="http://schemas.microsoft.com/office/drawing/2014/main" id="{07AF5EC9-7826-4655-B6C9-B2987AA95ED8}"/>
+                <a16:creationId xmlns:a16="http://schemas.microsoft.com/office/drawing/2014/main" id="{1E496048-6DC2-46C5-925A-165492FC89C3}"/>
               </a:ext>
             </a:extLst>
           </p:cNvPr>
@@ -20534,7 +21370,7 @@
     </p:spTree>
     <p:extLst>
       <p:ext uri="{BB962C8B-B14F-4D97-AF65-F5344CB8AC3E}">
-        <p14:creationId xmlns:p14="http://schemas.microsoft.com/office/powerpoint/2010/main" val="505562968"/>
+        <p14:creationId xmlns:p14="http://schemas.microsoft.com/office/powerpoint/2010/main" val="854956063"/>
       </p:ext>
     </p:extLst>
   </p:cSld>
